--- a/work/2026-09-18-AI-News-generated.pptx
+++ b/work/2026-09-18-AI-News-generated.pptx
@@ -3107,7 +3107,7 @@
         <p:spPr>
           <a:xfrm>
             <a:off x="82296" y="0"/>
-            <a:ext cx="5221224" cy="329184"/>
+            <a:ext cx="2932789" cy="329184"/>
           </a:xfrm>
           <a:prstGeom prst="rect">
             <a:avLst/>
@@ -3115,7 +3115,7 @@
           <a:noFill/>
         </p:spPr>
         <p:txBody>
-          <a:bodyPr wrap="square" lIns="45720" rIns="45720" tIns="18288" bIns="18288">
+          <a:bodyPr wrap="none" lIns="45720" rIns="45720" tIns="18288" bIns="18288">
             <a:spAutoFit/>
           </a:bodyPr>
           <a:lstStyle/>
@@ -3393,7 +3393,7 @@
         <p:spPr>
           <a:xfrm>
             <a:off x="82296" y="0"/>
-            <a:ext cx="8979408" cy="329184"/>
+            <a:ext cx="2349682" cy="329184"/>
           </a:xfrm>
           <a:prstGeom prst="rect">
             <a:avLst/>
@@ -3401,56 +3401,49 @@
           <a:noFill/>
         </p:spPr>
         <p:txBody>
+          <a:bodyPr wrap="none" lIns="45720" rIns="45720" tIns="18288" bIns="18288">
+            <a:spAutoFit/>
+          </a:bodyPr>
+          <a:lstStyle/>
+          <a:p>
+            <a:r>
+              <a:rPr sz="2000" b="1">
+                <a:solidFill>
+                  <a:srgbClr val="000000"/>
+                </a:solidFill>
+                <a:latin typeface="Calibri"/>
+              </a:rPr>
+              <a:t>About the Speaker</a:t>
+            </a:r>
+          </a:p>
+        </p:txBody>
+      </p:sp>
+      <p:sp>
+        <p:nvSpPr>
+          <p:cNvPr id="3" name="TextBox 2"/>
+          <p:cNvSpPr txBox="1"/>
+          <p:nvPr/>
+        </p:nvSpPr>
+        <p:spPr>
+          <a:xfrm>
+            <a:off x="3374136" y="1290828"/>
+            <a:ext cx="4480560" cy="2895600"/>
+          </a:xfrm>
+          <a:prstGeom prst="rect">
+            <a:avLst/>
+          </a:prstGeom>
+          <a:noFill/>
+        </p:spPr>
+        <p:txBody>
           <a:bodyPr wrap="square" lIns="45720" rIns="45720" tIns="18288" bIns="18288">
             <a:spAutoFit/>
           </a:bodyPr>
           <a:lstStyle/>
           <a:p>
             <a:r>
-              <a:rPr sz="2000" b="1">
-                <a:solidFill>
-                  <a:srgbClr val="000000"/>
-                </a:solidFill>
-                <a:latin typeface="Calibri"/>
-              </a:rPr>
-              <a:t>About the Speaker</a:t>
-            </a:r>
-          </a:p>
-        </p:txBody>
-      </p:sp>
-      <p:sp>
-        <p:nvSpPr>
-          <p:cNvPr id="3" name="TextBox 2"/>
-          <p:cNvSpPr txBox="1"/>
-          <p:nvPr/>
-        </p:nvSpPr>
-        <p:spPr>
-          <a:xfrm>
-            <a:off x="1764792" y="420624"/>
-            <a:ext cx="7296912" cy="2139696"/>
-          </a:xfrm>
-          <a:prstGeom prst="rect">
-            <a:avLst/>
-          </a:prstGeom>
-          <a:solidFill>
-            <a:srgbClr val="FFF2CC"/>
-          </a:solidFill>
-          <a:ln w="9525">
-            <a:solidFill>
-              <a:srgbClr val="FF0000"/>
-            </a:solidFill>
-          </a:ln>
-        </p:spPr>
-        <p:txBody>
-          <a:bodyPr wrap="square" lIns="45720" rIns="45720" tIns="18288" bIns="18288">
-            <a:spAutoFit/>
-          </a:bodyPr>
-          <a:lstStyle/>
-          <a:p>
-            <a:r>
               <a:rPr sz="2400" b="1">
                 <a:solidFill>
-                  <a:srgbClr val="000000"/>
+                  <a:srgbClr val="FF0000"/>
                 </a:solidFill>
                 <a:latin typeface="Calibri"/>
               </a:rPr>
@@ -3563,7 +3556,7 @@
         </p:blipFill>
         <p:spPr>
           <a:xfrm>
-            <a:off x="82296" y="420624"/>
+            <a:off x="1289303" y="1952244"/>
             <a:ext cx="1572768" cy="1572768"/>
           </a:xfrm>
           <a:prstGeom prst="rect">
@@ -3602,8 +3595,8 @@
         </p:nvSpPr>
         <p:spPr>
           <a:xfrm>
-            <a:off x="82296" y="0"/>
-            <a:ext cx="8979408" cy="329184"/>
+            <a:off x="82296" y="1714500"/>
+            <a:ext cx="8979408" cy="721360"/>
           </a:xfrm>
           <a:prstGeom prst="rect">
             <a:avLst/>
@@ -3616,8 +3609,9 @@
           </a:bodyPr>
           <a:lstStyle/>
           <a:p>
-            <a:r>
-              <a:rPr sz="2000" b="1">
+            <a:pPr algn="ctr"/>
+            <a:r>
+              <a:rPr sz="4000" b="1">
                 <a:solidFill>
                   <a:srgbClr val="000000"/>
                 </a:solidFill>
@@ -3636,37 +3630,19 @@
         </p:nvSpPr>
         <p:spPr>
           <a:xfrm>
-            <a:off x="82296" y="420624"/>
-            <a:ext cx="8979408" cy="1651507"/>
+            <a:off x="1479939" y="2582164"/>
+            <a:ext cx="6184121" cy="1383792"/>
           </a:xfrm>
           <a:prstGeom prst="rect">
             <a:avLst/>
           </a:prstGeom>
-          <a:solidFill>
-            <a:srgbClr val="FFF2CC"/>
-          </a:solidFill>
-          <a:ln w="9525">
-            <a:solidFill>
-              <a:srgbClr val="FF0000"/>
-            </a:solidFill>
-          </a:ln>
+          <a:noFill/>
         </p:spPr>
         <p:txBody>
           <a:bodyPr wrap="square" lIns="45720" rIns="45720" tIns="18288" bIns="18288">
             <a:spAutoFit/>
           </a:bodyPr>
           <a:lstStyle/>
-          <a:p>
-            <a:r>
-              <a:rPr sz="1700" b="1">
-                <a:solidFill>
-                  <a:srgbClr val="000000"/>
-                </a:solidFill>
-                <a:latin typeface="Calibri"/>
-              </a:rPr>
-              <a:t>Questions and discussion</a:t>
-            </a:r>
-          </a:p>
           <a:p>
             <a:pPr marL="171450" indent="-133350">
               <a:buClr>
@@ -3789,7 +3765,7 @@
         <p:spPr>
           <a:xfrm>
             <a:off x="82296" y="0"/>
-            <a:ext cx="8979408" cy="329184"/>
+            <a:ext cx="1625809" cy="329184"/>
           </a:xfrm>
           <a:prstGeom prst="rect">
             <a:avLst/>
@@ -3797,7 +3773,7 @@
           <a:noFill/>
         </p:spPr>
         <p:txBody>
-          <a:bodyPr wrap="square" lIns="45720" rIns="45720" tIns="18288" bIns="18288">
+          <a:bodyPr wrap="none" lIns="45720" rIns="45720" tIns="18288" bIns="18288">
             <a:spAutoFit/>
           </a:bodyPr>
           <a:lstStyle/>
@@ -3823,7 +3799,7 @@
         <p:spPr>
           <a:xfrm>
             <a:off x="82296" y="347472"/>
-            <a:ext cx="3010911" cy="201168"/>
+            <a:ext cx="3010911" cy="237744"/>
           </a:xfrm>
           <a:prstGeom prst="rect">
             <a:avLst/>
@@ -3955,53 +3931,8 @@
         </p:nvSpPr>
         <p:spPr>
           <a:xfrm>
-            <a:off x="7251315" y="347472"/>
-            <a:ext cx="1810388" cy="201168"/>
-          </a:xfrm>
-          <a:prstGeom prst="rect">
-            <a:avLst/>
-          </a:prstGeom>
-          <a:noFill/>
-        </p:spPr>
-        <p:txBody>
-          <a:bodyPr wrap="square" lIns="45720" rIns="45720" tIns="18288" bIns="18288">
-            <a:spAutoFit/>
-          </a:bodyPr>
-          <a:lstStyle/>
-          <a:p>
-            <a:pPr>
-              <a:lnSpc>
-                <a:spcPts val="1080"/>
-              </a:lnSpc>
-              <a:spcBef>
-                <a:spcPts val="0"/>
-              </a:spcBef>
-              <a:spcAft>
-                <a:spcPts val="0"/>
-              </a:spcAft>
-            </a:pPr>
-            <a:r>
-              <a:rPr sz="900" b="0">
-                <a:solidFill>
-                  <a:srgbClr val="595959"/>
-                </a:solidFill>
-                <a:latin typeface="Calibri"/>
-              </a:rPr>
-              <a:t>Votes counted through Sept 11, 2026</a:t>
-            </a:r>
-          </a:p>
-        </p:txBody>
-      </p:sp>
-      <p:sp>
-        <p:nvSpPr>
-          <p:cNvPr id="5" name="TextBox 4"/>
-          <p:cNvSpPr txBox="1"/>
-          <p:nvPr/>
-        </p:nvSpPr>
-        <p:spPr>
-          <a:xfrm>
-            <a:off x="82296" y="566928"/>
-            <a:ext cx="1923269" cy="4489704"/>
+            <a:off x="6678332" y="347472"/>
+            <a:ext cx="2383371" cy="237744"/>
           </a:xfrm>
           <a:prstGeom prst="rect">
             <a:avLst/>
@@ -4016,14 +3947,14 @@
           </a:ln>
         </p:spPr>
         <p:txBody>
-          <a:bodyPr wrap="none" lIns="45720" rIns="45720" tIns="18288" bIns="18288">
+          <a:bodyPr wrap="square" lIns="45720" rIns="45720" tIns="18288" bIns="18288">
             <a:spAutoFit/>
           </a:bodyPr>
           <a:lstStyle/>
           <a:p>
             <a:pPr>
               <a:lnSpc>
-                <a:spcPts val="1320"/>
+                <a:spcPts val="1439"/>
               </a:lnSpc>
               <a:spcBef>
                 <a:spcPts val="0"/>
@@ -4033,1050 +3964,27 @@
               </a:spcAft>
             </a:pPr>
             <a:r>
-              <a:rPr sz="1100" b="1">
-                <a:solidFill>
-                  <a:srgbClr val="000000"/>
-                </a:solidFill>
-                <a:latin typeface="Calibri"/>
-              </a:rPr>
-              <a:t>English</a:t>
-            </a:r>
-          </a:p>
-          <a:p>
-            <a:pPr>
-              <a:lnSpc>
-                <a:spcPts val="1080"/>
-              </a:lnSpc>
-              <a:spcBef>
-                <a:spcPts val="0"/>
-              </a:spcBef>
-              <a:spcAft>
-                <a:spcPts val="0"/>
-              </a:spcAft>
-            </a:pPr>
-            <a:r>
-              <a:rPr sz="900" b="0">
-                <a:solidFill>
-                  <a:srgbClr val="0563C1"/>
-                </a:solidFill>
-                <a:latin typeface="Calibri"/>
-                <a:hlinkClick r:id="rId2"/>
-              </a:rPr>
-              <a:t>https://arena.ai/leaderboard/text</a:t>
-            </a:r>
-          </a:p>
-          <a:p>
-            <a:pPr>
-              <a:lnSpc>
-                <a:spcPts val="1300"/>
-              </a:lnSpc>
-              <a:spcBef>
-                <a:spcPts val="0"/>
-              </a:spcBef>
-              <a:spcAft>
-                <a:spcPts val="0"/>
-              </a:spcAft>
-            </a:pPr>
-            <a:r>
-              <a:rPr sz="1084" b="0">
-                <a:solidFill>
-                  <a:srgbClr val="4472C4"/>
-                </a:solidFill>
-                <a:latin typeface="Calibri"/>
-              </a:rPr>
-              <a:t>■ </a:t>
-            </a:r>
-            <a:r>
-              <a:rPr sz="1084" b="1">
-                <a:solidFill>
-                  <a:srgbClr val="000000"/>
-                </a:solidFill>
-                <a:latin typeface="Calibri"/>
-              </a:rPr>
-              <a:t>1506  </a:t>
-            </a:r>
-            <a:r>
-              <a:rPr sz="1084" b="0">
-                <a:solidFill>
-                  <a:srgbClr val="000000"/>
-                </a:solidFill>
-                <a:latin typeface="Calibri"/>
-              </a:rPr>
-              <a:t>claude-fable-5</a:t>
-            </a:r>
-          </a:p>
-          <a:p>
-            <a:pPr>
-              <a:lnSpc>
-                <a:spcPts val="1300"/>
-              </a:lnSpc>
-              <a:spcBef>
-                <a:spcPts val="0"/>
-              </a:spcBef>
-              <a:spcAft>
-                <a:spcPts val="0"/>
-              </a:spcAft>
-            </a:pPr>
-            <a:r>
-              <a:rPr sz="1084" b="0">
-                <a:solidFill>
-                  <a:srgbClr val="4472C4"/>
-                </a:solidFill>
-                <a:latin typeface="Calibri"/>
-              </a:rPr>
-              <a:t>■ </a:t>
-            </a:r>
-            <a:r>
-              <a:rPr sz="1084" b="1">
-                <a:solidFill>
-                  <a:srgbClr val="000000"/>
-                </a:solidFill>
-                <a:latin typeface="Calibri"/>
-              </a:rPr>
-              <a:t>1505  </a:t>
-            </a:r>
-            <a:r>
-              <a:rPr sz="1084" b="0">
-                <a:solidFill>
-                  <a:srgbClr val="000000"/>
-                </a:solidFill>
-                <a:latin typeface="Calibri"/>
-              </a:rPr>
-              <a:t>claude-opus-4-6-high</a:t>
-            </a:r>
-          </a:p>
-          <a:p>
-            <a:pPr>
-              <a:lnSpc>
-                <a:spcPts val="1300"/>
-              </a:lnSpc>
-              <a:spcBef>
-                <a:spcPts val="0"/>
-              </a:spcBef>
-              <a:spcAft>
-                <a:spcPts val="0"/>
-              </a:spcAft>
-            </a:pPr>
-            <a:r>
-              <a:rPr sz="1084" b="0">
-                <a:solidFill>
-                  <a:srgbClr val="4472C4"/>
-                </a:solidFill>
-                <a:latin typeface="Calibri"/>
-              </a:rPr>
-              <a:t>■ </a:t>
-            </a:r>
-            <a:r>
-              <a:rPr sz="1084" b="1">
-                <a:solidFill>
-                  <a:srgbClr val="000000"/>
-                </a:solidFill>
-                <a:latin typeface="Calibri"/>
-              </a:rPr>
-              <a:t>1502  </a:t>
-            </a:r>
-            <a:r>
-              <a:rPr sz="1084" b="0">
-                <a:solidFill>
-                  <a:srgbClr val="000000"/>
-                </a:solidFill>
-                <a:latin typeface="Calibri"/>
-              </a:rPr>
-              <a:t>claude-opus-4-7-high</a:t>
-            </a:r>
-          </a:p>
-          <a:p>
-            <a:pPr>
-              <a:lnSpc>
-                <a:spcPts val="1300"/>
-              </a:lnSpc>
-              <a:spcBef>
-                <a:spcPts val="0"/>
-              </a:spcBef>
-              <a:spcAft>
-                <a:spcPts val="0"/>
-              </a:spcAft>
-            </a:pPr>
-            <a:r>
-              <a:rPr sz="1084" b="0">
-                <a:solidFill>
-                  <a:srgbClr val="4472C4"/>
-                </a:solidFill>
-                <a:latin typeface="Calibri"/>
-              </a:rPr>
-              <a:t>■ </a:t>
-            </a:r>
-            <a:r>
-              <a:rPr sz="1084" b="1">
-                <a:solidFill>
-                  <a:srgbClr val="000000"/>
-                </a:solidFill>
-                <a:latin typeface="Calibri"/>
-              </a:rPr>
-              <a:t>1501  </a:t>
-            </a:r>
-            <a:r>
-              <a:rPr sz="1084" b="0">
-                <a:solidFill>
-                  <a:srgbClr val="000000"/>
-                </a:solidFill>
-                <a:latin typeface="Calibri"/>
-              </a:rPr>
-              <a:t>claude-fable-5.1-max</a:t>
-            </a:r>
-          </a:p>
-          <a:p>
-            <a:pPr>
-              <a:lnSpc>
-                <a:spcPts val="1300"/>
-              </a:lnSpc>
-              <a:spcBef>
-                <a:spcPts val="0"/>
-              </a:spcBef>
-              <a:spcAft>
-                <a:spcPts val="0"/>
-              </a:spcAft>
-            </a:pPr>
-            <a:r>
-              <a:rPr sz="1084" b="0">
-                <a:solidFill>
-                  <a:srgbClr val="A6A6A6"/>
-                </a:solidFill>
-                <a:latin typeface="Calibri"/>
-              </a:rPr>
-              <a:t>■ </a:t>
-            </a:r>
-            <a:r>
-              <a:rPr sz="1084" b="1">
-                <a:solidFill>
-                  <a:srgbClr val="000000"/>
-                </a:solidFill>
-                <a:latin typeface="Calibri"/>
-              </a:rPr>
-              <a:t>1499  </a:t>
-            </a:r>
-            <a:r>
-              <a:rPr sz="1084" b="0">
-                <a:solidFill>
-                  <a:srgbClr val="000000"/>
-                </a:solidFill>
-                <a:latin typeface="Calibri"/>
-              </a:rPr>
-              <a:t>muse-spark-1.2 (xHigh)</a:t>
-            </a:r>
-          </a:p>
-          <a:p>
-            <a:pPr>
-              <a:lnSpc>
-                <a:spcPts val="1300"/>
-              </a:lnSpc>
-              <a:spcBef>
-                <a:spcPts val="0"/>
-              </a:spcBef>
-              <a:spcAft>
-                <a:spcPts val="0"/>
-              </a:spcAft>
-            </a:pPr>
-            <a:r>
-              <a:rPr sz="1084" b="0">
-                <a:solidFill>
-                  <a:srgbClr val="4472C4"/>
-                </a:solidFill>
-                <a:latin typeface="Calibri"/>
-              </a:rPr>
-              <a:t>■ </a:t>
-            </a:r>
-            <a:r>
-              <a:rPr sz="1084" b="1">
-                <a:solidFill>
-                  <a:srgbClr val="000000"/>
-                </a:solidFill>
-                <a:latin typeface="Calibri"/>
-              </a:rPr>
-              <a:t>1497  </a:t>
-            </a:r>
-            <a:r>
-              <a:rPr sz="1084" b="0">
-                <a:solidFill>
-                  <a:srgbClr val="000000"/>
-                </a:solidFill>
-                <a:latin typeface="Calibri"/>
-              </a:rPr>
-              <a:t>claude-opus-4-6</a:t>
-            </a:r>
-          </a:p>
-          <a:p>
-            <a:pPr>
-              <a:lnSpc>
-                <a:spcPts val="1300"/>
-              </a:lnSpc>
-              <a:spcBef>
-                <a:spcPts val="0"/>
-              </a:spcBef>
-              <a:spcAft>
-                <a:spcPts val="0"/>
-              </a:spcAft>
-            </a:pPr>
-            <a:r>
-              <a:rPr sz="1084" b="0">
-                <a:solidFill>
-                  <a:srgbClr val="4472C4"/>
-                </a:solidFill>
-                <a:latin typeface="Calibri"/>
-              </a:rPr>
-              <a:t>■ </a:t>
-            </a:r>
-            <a:r>
-              <a:rPr sz="1084" b="1">
-                <a:solidFill>
-                  <a:srgbClr val="000000"/>
-                </a:solidFill>
-                <a:latin typeface="Calibri"/>
-              </a:rPr>
-              <a:t>1494  </a:t>
-            </a:r>
-            <a:r>
-              <a:rPr sz="1084" b="0">
-                <a:solidFill>
-                  <a:srgbClr val="000000"/>
-                </a:solidFill>
-                <a:latin typeface="Calibri"/>
-              </a:rPr>
-              <a:t>claude-opus-4-7</a:t>
-            </a:r>
-          </a:p>
-          <a:p>
-            <a:pPr>
-              <a:lnSpc>
-                <a:spcPts val="1300"/>
-              </a:lnSpc>
-              <a:spcBef>
-                <a:spcPts val="0"/>
-              </a:spcBef>
-              <a:spcAft>
-                <a:spcPts val="0"/>
-              </a:spcAft>
-            </a:pPr>
-            <a:r>
-              <a:rPr sz="1084" b="0">
-                <a:solidFill>
-                  <a:srgbClr val="A6A6A6"/>
-                </a:solidFill>
-                <a:latin typeface="Calibri"/>
-              </a:rPr>
-              <a:t>■ </a:t>
-            </a:r>
-            <a:r>
-              <a:rPr sz="1084" b="1">
-                <a:solidFill>
-                  <a:srgbClr val="000000"/>
-                </a:solidFill>
-                <a:latin typeface="Calibri"/>
-              </a:rPr>
-              <a:t>1494  </a:t>
-            </a:r>
-            <a:r>
-              <a:rPr sz="1084" b="0">
-                <a:solidFill>
-                  <a:srgbClr val="000000"/>
-                </a:solidFill>
-                <a:latin typeface="Calibri"/>
-              </a:rPr>
-              <a:t>muse-spark-1.1</a:t>
-            </a:r>
-          </a:p>
-          <a:p>
-            <a:pPr>
-              <a:lnSpc>
-                <a:spcPts val="1300"/>
-              </a:lnSpc>
-              <a:spcBef>
-                <a:spcPts val="0"/>
-              </a:spcBef>
-              <a:spcAft>
-                <a:spcPts val="0"/>
-              </a:spcAft>
-            </a:pPr>
-            <a:r>
-              <a:rPr sz="1084" b="0">
-                <a:solidFill>
-                  <a:srgbClr val="4472C4"/>
-                </a:solidFill>
-                <a:latin typeface="Calibri"/>
-              </a:rPr>
-              <a:t>■ </a:t>
-            </a:r>
-            <a:r>
-              <a:rPr sz="1084" b="1">
-                <a:solidFill>
-                  <a:srgbClr val="000000"/>
-                </a:solidFill>
-                <a:latin typeface="Calibri"/>
-              </a:rPr>
-              <a:t>1493  </a:t>
-            </a:r>
-            <a:r>
-              <a:rPr sz="1084" b="0">
-                <a:solidFill>
-                  <a:srgbClr val="000000"/>
-                </a:solidFill>
-                <a:latin typeface="Calibri"/>
-              </a:rPr>
-              <a:t>claude-opus-5-high</a:t>
-            </a:r>
-          </a:p>
-          <a:p>
-            <a:pPr>
-              <a:lnSpc>
-                <a:spcPts val="1300"/>
-              </a:lnSpc>
-              <a:spcBef>
-                <a:spcPts val="0"/>
-              </a:spcBef>
-              <a:spcAft>
-                <a:spcPts val="0"/>
-              </a:spcAft>
-            </a:pPr>
-            <a:r>
-              <a:rPr sz="1084" b="0">
-                <a:solidFill>
-                  <a:srgbClr val="FF0000"/>
-                </a:solidFill>
-                <a:latin typeface="Calibri"/>
-              </a:rPr>
-              <a:t>■ </a:t>
-            </a:r>
-            <a:r>
-              <a:rPr sz="1084" b="1">
-                <a:solidFill>
-                  <a:srgbClr val="000000"/>
-                </a:solidFill>
-                <a:latin typeface="Calibri"/>
-              </a:rPr>
-              <a:t>1493  </a:t>
-            </a:r>
-            <a:r>
-              <a:rPr sz="1084" b="0">
-                <a:solidFill>
-                  <a:srgbClr val="000000"/>
-                </a:solidFill>
-                <a:latin typeface="Calibri"/>
-              </a:rPr>
-              <a:t>gemini-3.8-flash-high</a:t>
-            </a:r>
-          </a:p>
-          <a:p>
-            <a:pPr>
-              <a:lnSpc>
-                <a:spcPts val="1300"/>
-              </a:lnSpc>
-              <a:spcBef>
-                <a:spcPts val="0"/>
-              </a:spcBef>
-              <a:spcAft>
-                <a:spcPts val="0"/>
-              </a:spcAft>
-            </a:pPr>
-            <a:r>
-              <a:rPr sz="1084" b="0">
-                <a:solidFill>
-                  <a:srgbClr val="FF0000"/>
-                </a:solidFill>
-                <a:latin typeface="Calibri"/>
-              </a:rPr>
-              <a:t>■ </a:t>
-            </a:r>
-            <a:r>
-              <a:rPr sz="1084" b="1">
-                <a:solidFill>
-                  <a:srgbClr val="000000"/>
-                </a:solidFill>
-                <a:latin typeface="Calibri"/>
-              </a:rPr>
-              <a:t>1490  </a:t>
-            </a:r>
-            <a:r>
-              <a:rPr sz="1084" b="0">
-                <a:solidFill>
-                  <a:srgbClr val="000000"/>
-                </a:solidFill>
-                <a:latin typeface="Calibri"/>
-              </a:rPr>
-              <a:t>gemini-3.7-flash-high</a:t>
-            </a:r>
-          </a:p>
-          <a:p>
-            <a:pPr>
-              <a:lnSpc>
-                <a:spcPts val="1300"/>
-              </a:lnSpc>
-              <a:spcBef>
-                <a:spcPts val="0"/>
-              </a:spcBef>
-              <a:spcAft>
-                <a:spcPts val="0"/>
-              </a:spcAft>
-            </a:pPr>
-            <a:r>
-              <a:rPr sz="1084" b="0">
-                <a:solidFill>
-                  <a:srgbClr val="A6A6A6"/>
-                </a:solidFill>
-                <a:latin typeface="Calibri"/>
-              </a:rPr>
-              <a:t>■ </a:t>
-            </a:r>
-            <a:r>
-              <a:rPr sz="1084" b="1">
-                <a:solidFill>
-                  <a:srgbClr val="000000"/>
-                </a:solidFill>
-                <a:latin typeface="Calibri"/>
-              </a:rPr>
-              <a:t>1488  </a:t>
-            </a:r>
-            <a:r>
-              <a:rPr sz="1084" b="0">
-                <a:solidFill>
-                  <a:srgbClr val="000000"/>
-                </a:solidFill>
-                <a:latin typeface="Calibri"/>
-              </a:rPr>
-              <a:t>muse-spark</a:t>
-            </a:r>
-          </a:p>
-          <a:p>
-            <a:pPr>
-              <a:lnSpc>
-                <a:spcPts val="1300"/>
-              </a:lnSpc>
-              <a:spcBef>
-                <a:spcPts val="0"/>
-              </a:spcBef>
-              <a:spcAft>
-                <a:spcPts val="0"/>
-              </a:spcAft>
-            </a:pPr>
-            <a:r>
-              <a:rPr sz="1084" b="0">
-                <a:solidFill>
-                  <a:srgbClr val="FF0000"/>
-                </a:solidFill>
-                <a:latin typeface="Calibri"/>
-              </a:rPr>
-              <a:t>■ </a:t>
-            </a:r>
-            <a:r>
-              <a:rPr sz="1084" b="1">
-                <a:solidFill>
-                  <a:srgbClr val="000000"/>
-                </a:solidFill>
-                <a:latin typeface="Calibri"/>
-              </a:rPr>
-              <a:t>1487  </a:t>
-            </a:r>
-            <a:r>
-              <a:rPr sz="1084" b="0">
-                <a:solidFill>
-                  <a:srgbClr val="000000"/>
-                </a:solidFill>
-                <a:latin typeface="Calibri"/>
-              </a:rPr>
-              <a:t>gemini-3.1-pro-preview</a:t>
-            </a:r>
-          </a:p>
-          <a:p>
-            <a:pPr>
-              <a:lnSpc>
-                <a:spcPts val="1300"/>
-              </a:lnSpc>
-              <a:spcBef>
-                <a:spcPts val="0"/>
-              </a:spcBef>
-              <a:spcAft>
-                <a:spcPts val="0"/>
-              </a:spcAft>
-            </a:pPr>
-            <a:r>
-              <a:rPr sz="1084" b="0">
-                <a:solidFill>
-                  <a:srgbClr val="4472C4"/>
-                </a:solidFill>
-                <a:latin typeface="Calibri"/>
-              </a:rPr>
-              <a:t>■ </a:t>
-            </a:r>
-            <a:r>
-              <a:rPr sz="1084" b="1">
-                <a:solidFill>
-                  <a:srgbClr val="000000"/>
-                </a:solidFill>
-                <a:latin typeface="Calibri"/>
-              </a:rPr>
-              <a:t>1487  </a:t>
-            </a:r>
-            <a:r>
-              <a:rPr sz="1084" b="0">
-                <a:solidFill>
-                  <a:srgbClr val="000000"/>
-                </a:solidFill>
-                <a:latin typeface="Calibri"/>
-              </a:rPr>
-              <a:t>claude-opus-5-max</a:t>
-            </a:r>
-          </a:p>
-          <a:p>
-            <a:pPr>
-              <a:lnSpc>
-                <a:spcPts val="1300"/>
-              </a:lnSpc>
-              <a:spcBef>
-                <a:spcPts val="0"/>
-              </a:spcBef>
-              <a:spcAft>
-                <a:spcPts val="0"/>
-              </a:spcAft>
-            </a:pPr>
-            <a:r>
-              <a:rPr sz="1084" b="0">
-                <a:solidFill>
-                  <a:srgbClr val="00B050"/>
-                </a:solidFill>
-                <a:latin typeface="Calibri"/>
-              </a:rPr>
-              <a:t>■ </a:t>
-            </a:r>
-            <a:r>
-              <a:rPr sz="1084" b="1">
-                <a:solidFill>
-                  <a:srgbClr val="000000"/>
-                </a:solidFill>
-                <a:latin typeface="Calibri"/>
-              </a:rPr>
-              <a:t>1486  </a:t>
-            </a:r>
-            <a:r>
-              <a:rPr sz="1084" b="0">
-                <a:solidFill>
-                  <a:srgbClr val="000000"/>
-                </a:solidFill>
-                <a:latin typeface="Calibri"/>
-              </a:rPr>
-              <a:t>glm-5.3-max</a:t>
-            </a:r>
-          </a:p>
-          <a:p>
-            <a:pPr>
-              <a:lnSpc>
-                <a:spcPts val="1300"/>
-              </a:lnSpc>
-              <a:spcBef>
-                <a:spcPts val="0"/>
-              </a:spcBef>
-              <a:spcAft>
-                <a:spcPts val="0"/>
-              </a:spcAft>
-            </a:pPr>
-            <a:r>
-              <a:rPr sz="1084" b="0">
-                <a:solidFill>
-                  <a:srgbClr val="FF0000"/>
-                </a:solidFill>
-                <a:latin typeface="Calibri"/>
-              </a:rPr>
-              <a:t>■ </a:t>
-            </a:r>
-            <a:r>
-              <a:rPr sz="1084" b="1">
-                <a:solidFill>
-                  <a:srgbClr val="000000"/>
-                </a:solidFill>
-                <a:latin typeface="Calibri"/>
-              </a:rPr>
-              <a:t>1486  </a:t>
-            </a:r>
-            <a:r>
-              <a:rPr sz="1084" b="0">
-                <a:solidFill>
-                  <a:srgbClr val="000000"/>
-                </a:solidFill>
-                <a:latin typeface="Calibri"/>
-              </a:rPr>
-              <a:t>gemini-3-pro</a:t>
-            </a:r>
-          </a:p>
-          <a:p>
-            <a:pPr>
-              <a:lnSpc>
-                <a:spcPts val="1300"/>
-              </a:lnSpc>
-              <a:spcBef>
-                <a:spcPts val="0"/>
-              </a:spcBef>
-              <a:spcAft>
-                <a:spcPts val="0"/>
-              </a:spcAft>
-            </a:pPr>
-            <a:r>
-              <a:rPr sz="1084" b="0">
-                <a:solidFill>
-                  <a:srgbClr val="00B050"/>
-                </a:solidFill>
-                <a:latin typeface="Calibri"/>
-              </a:rPr>
-              <a:t>■ </a:t>
-            </a:r>
-            <a:r>
-              <a:rPr sz="1084" b="1">
-                <a:solidFill>
-                  <a:srgbClr val="000000"/>
-                </a:solidFill>
-                <a:latin typeface="Calibri"/>
-              </a:rPr>
-              <a:t>1485  </a:t>
-            </a:r>
-            <a:r>
-              <a:rPr sz="1084" b="0">
-                <a:solidFill>
-                  <a:srgbClr val="000000"/>
-                </a:solidFill>
-                <a:latin typeface="Calibri"/>
-              </a:rPr>
-              <a:t>kimi-k3-max</a:t>
-            </a:r>
-          </a:p>
-          <a:p>
-            <a:pPr>
-              <a:lnSpc>
-                <a:spcPts val="1300"/>
-              </a:lnSpc>
-              <a:spcBef>
-                <a:spcPts val="0"/>
-              </a:spcBef>
-              <a:spcAft>
-                <a:spcPts val="0"/>
-              </a:spcAft>
-            </a:pPr>
-            <a:r>
-              <a:rPr sz="1084" b="0">
-                <a:solidFill>
-                  <a:srgbClr val="4472C4"/>
-                </a:solidFill>
-                <a:latin typeface="Calibri"/>
-              </a:rPr>
-              <a:t>■ </a:t>
-            </a:r>
-            <a:r>
-              <a:rPr sz="1084" b="1">
-                <a:solidFill>
-                  <a:srgbClr val="000000"/>
-                </a:solidFill>
-                <a:latin typeface="Calibri"/>
-              </a:rPr>
-              <a:t>1482  </a:t>
-            </a:r>
-            <a:r>
-              <a:rPr sz="1084" b="0">
-                <a:solidFill>
-                  <a:srgbClr val="000000"/>
-                </a:solidFill>
-                <a:latin typeface="Calibri"/>
-              </a:rPr>
-              <a:t>claude-opus-4-8-high</a:t>
-            </a:r>
-          </a:p>
-          <a:p>
-            <a:pPr>
-              <a:lnSpc>
-                <a:spcPts val="1300"/>
-              </a:lnSpc>
-              <a:spcBef>
-                <a:spcPts val="0"/>
-              </a:spcBef>
-              <a:spcAft>
-                <a:spcPts val="0"/>
-              </a:spcAft>
-            </a:pPr>
-            <a:r>
-              <a:rPr sz="1084" b="0">
-                <a:solidFill>
-                  <a:srgbClr val="FFD700"/>
-                </a:solidFill>
-                <a:latin typeface="Calibri"/>
-              </a:rPr>
-              <a:t>■ </a:t>
-            </a:r>
-            <a:r>
-              <a:rPr sz="1084" b="1">
-                <a:solidFill>
-                  <a:srgbClr val="000000"/>
-                </a:solidFill>
-                <a:latin typeface="Calibri"/>
-              </a:rPr>
-              <a:t>1482  </a:t>
-            </a:r>
-            <a:r>
-              <a:rPr sz="1084" b="0">
-                <a:solidFill>
-                  <a:srgbClr val="000000"/>
-                </a:solidFill>
-                <a:latin typeface="Calibri"/>
-              </a:rPr>
-              <a:t>gpt-5.6-sol-xhigh</a:t>
-            </a:r>
-          </a:p>
-          <a:p>
-            <a:pPr>
-              <a:lnSpc>
-                <a:spcPts val="1300"/>
-              </a:lnSpc>
-              <a:spcBef>
-                <a:spcPts val="0"/>
-              </a:spcBef>
-              <a:spcAft>
-                <a:spcPts val="0"/>
-              </a:spcAft>
-            </a:pPr>
-            <a:r>
-              <a:rPr sz="1084" b="0">
-                <a:solidFill>
-                  <a:srgbClr val="FFD700"/>
-                </a:solidFill>
-                <a:latin typeface="Calibri"/>
-              </a:rPr>
-              <a:t>■ </a:t>
-            </a:r>
-            <a:r>
-              <a:rPr sz="1084" b="1">
-                <a:solidFill>
-                  <a:srgbClr val="000000"/>
-                </a:solidFill>
-                <a:latin typeface="Calibri"/>
-              </a:rPr>
-              <a:t>1482  </a:t>
-            </a:r>
-            <a:r>
-              <a:rPr sz="1084" b="0">
-                <a:solidFill>
-                  <a:srgbClr val="000000"/>
-                </a:solidFill>
-                <a:latin typeface="Calibri"/>
-              </a:rPr>
-              <a:t>gpt-5.5-high</a:t>
-            </a:r>
-          </a:p>
-          <a:p>
-            <a:pPr>
-              <a:lnSpc>
-                <a:spcPts val="1300"/>
-              </a:lnSpc>
-              <a:spcBef>
-                <a:spcPts val="0"/>
-              </a:spcBef>
-              <a:spcAft>
-                <a:spcPts val="0"/>
-              </a:spcAft>
-            </a:pPr>
-            <a:r>
-              <a:rPr sz="1084" b="0">
-                <a:solidFill>
-                  <a:srgbClr val="00B050"/>
-                </a:solidFill>
-                <a:latin typeface="Calibri"/>
-              </a:rPr>
-              <a:t>■ </a:t>
-            </a:r>
-            <a:r>
-              <a:rPr sz="1084" b="1">
-                <a:solidFill>
-                  <a:srgbClr val="000000"/>
-                </a:solidFill>
-                <a:latin typeface="Calibri"/>
-              </a:rPr>
-              <a:t>1481  </a:t>
-            </a:r>
-            <a:r>
-              <a:rPr sz="1084" b="0">
-                <a:solidFill>
-                  <a:srgbClr val="000000"/>
-                </a:solidFill>
-                <a:latin typeface="Calibri"/>
-              </a:rPr>
-              <a:t>qwen3.8-max</a:t>
-            </a:r>
-          </a:p>
-          <a:p>
-            <a:pPr>
-              <a:lnSpc>
-                <a:spcPts val="1300"/>
-              </a:lnSpc>
-              <a:spcBef>
-                <a:spcPts val="0"/>
-              </a:spcBef>
-              <a:spcAft>
-                <a:spcPts val="0"/>
-              </a:spcAft>
-            </a:pPr>
-            <a:r>
-              <a:rPr sz="1084" b="0">
-                <a:solidFill>
-                  <a:srgbClr val="FF0000"/>
-                </a:solidFill>
-                <a:latin typeface="Calibri"/>
-              </a:rPr>
-              <a:t>■ </a:t>
-            </a:r>
-            <a:r>
-              <a:rPr sz="1084" b="1">
-                <a:solidFill>
-                  <a:srgbClr val="000000"/>
-                </a:solidFill>
-                <a:latin typeface="Calibri"/>
-              </a:rPr>
-              <a:t>1479  </a:t>
-            </a:r>
-            <a:r>
-              <a:rPr sz="1084" b="0">
-                <a:solidFill>
-                  <a:srgbClr val="000000"/>
-                </a:solidFill>
-                <a:latin typeface="Calibri"/>
-              </a:rPr>
-              <a:t>gemini-3.6-flash-high</a:t>
-            </a:r>
-          </a:p>
-          <a:p>
-            <a:pPr>
-              <a:lnSpc>
-                <a:spcPts val="1300"/>
-              </a:lnSpc>
-              <a:spcBef>
-                <a:spcPts val="0"/>
-              </a:spcBef>
-              <a:spcAft>
-                <a:spcPts val="0"/>
-              </a:spcAft>
-            </a:pPr>
-            <a:r>
-              <a:rPr sz="1084" b="0">
-                <a:solidFill>
-                  <a:srgbClr val="FF0000"/>
-                </a:solidFill>
-                <a:latin typeface="Calibri"/>
-              </a:rPr>
-              <a:t>■ </a:t>
-            </a:r>
-            <a:r>
-              <a:rPr sz="1084" b="1">
-                <a:solidFill>
-                  <a:srgbClr val="000000"/>
-                </a:solidFill>
-                <a:latin typeface="Calibri"/>
-              </a:rPr>
-              <a:t>1478  </a:t>
-            </a:r>
-            <a:r>
-              <a:rPr sz="1084" b="0">
-                <a:solidFill>
-                  <a:srgbClr val="000000"/>
-                </a:solidFill>
-                <a:latin typeface="Calibri"/>
-              </a:rPr>
-              <a:t>gemini-3.5-flash-high</a:t>
-            </a:r>
-          </a:p>
-          <a:p>
-            <a:pPr>
-              <a:lnSpc>
-                <a:spcPts val="1300"/>
-              </a:lnSpc>
-              <a:spcBef>
-                <a:spcPts val="0"/>
-              </a:spcBef>
-              <a:spcAft>
-                <a:spcPts val="0"/>
-              </a:spcAft>
-            </a:pPr>
-            <a:r>
-              <a:rPr sz="1084" b="0">
-                <a:solidFill>
-                  <a:srgbClr val="FFD700"/>
-                </a:solidFill>
-                <a:latin typeface="Calibri"/>
-              </a:rPr>
-              <a:t>■ </a:t>
-            </a:r>
-            <a:r>
-              <a:rPr sz="1084" b="1">
-                <a:solidFill>
-                  <a:srgbClr val="000000"/>
-                </a:solidFill>
-                <a:latin typeface="Calibri"/>
-              </a:rPr>
-              <a:t>1478  </a:t>
-            </a:r>
-            <a:r>
-              <a:rPr sz="1084" b="0">
-                <a:solidFill>
-                  <a:srgbClr val="000000"/>
-                </a:solidFill>
-                <a:latin typeface="Calibri"/>
-              </a:rPr>
-              <a:t>gpt-6-astra-max</a:t>
-            </a:r>
-          </a:p>
-          <a:p>
-            <a:pPr>
-              <a:lnSpc>
-                <a:spcPts val="1300"/>
-              </a:lnSpc>
-              <a:spcBef>
-                <a:spcPts val="0"/>
-              </a:spcBef>
-              <a:spcAft>
-                <a:spcPts val="0"/>
-              </a:spcAft>
-            </a:pPr>
-            <a:r>
-              <a:rPr sz="1084" b="0">
-                <a:solidFill>
-                  <a:srgbClr val="FFD700"/>
-                </a:solidFill>
-                <a:latin typeface="Calibri"/>
-              </a:rPr>
-              <a:t>■ </a:t>
-            </a:r>
-            <a:r>
-              <a:rPr sz="1084" b="1">
-                <a:solidFill>
-                  <a:srgbClr val="000000"/>
-                </a:solidFill>
-                <a:latin typeface="Calibri"/>
-              </a:rPr>
-              <a:t>1476  </a:t>
-            </a:r>
-            <a:r>
-              <a:rPr sz="1084" b="0">
-                <a:solidFill>
-                  <a:srgbClr val="000000"/>
-                </a:solidFill>
-                <a:latin typeface="Calibri"/>
-              </a:rPr>
-              <a:t>gpt-5.4-high</a:t>
-            </a:r>
-          </a:p>
-        </p:txBody>
-      </p:sp>
-      <p:sp>
-        <p:nvSpPr>
-          <p:cNvPr id="6" name="TextBox 5"/>
+              <a:rPr sz="1200" b="0">
+                <a:solidFill>
+                  <a:srgbClr val="000000"/>
+                </a:solidFill>
+                <a:latin typeface="Calibri"/>
+              </a:rPr>
+              <a:t>Votes counted through Sept 11, 2026</a:t>
+            </a:r>
+          </a:p>
+        </p:txBody>
+      </p:sp>
+      <p:sp>
+        <p:nvSpPr>
+          <p:cNvPr id="5" name="TextBox 4"/>
           <p:cNvSpPr txBox="1"/>
           <p:nvPr/>
         </p:nvSpPr>
         <p:spPr>
           <a:xfrm>
-            <a:off x="6426064" y="566928"/>
-            <a:ext cx="2635639" cy="4489704"/>
+            <a:off x="2425460" y="658368"/>
+            <a:ext cx="1622783" cy="3773423"/>
           </a:xfrm>
           <a:prstGeom prst="rect">
             <a:avLst/>
@@ -5098,7 +4006,7 @@
           <a:p>
             <a:pPr>
               <a:lnSpc>
-                <a:spcPts val="1320"/>
+                <a:spcPts val="1200"/>
               </a:lnSpc>
               <a:spcBef>
                 <a:spcPts val="0"/>
@@ -5108,13 +4016,13 @@
               </a:spcAft>
             </a:pPr>
             <a:r>
-              <a:rPr sz="1100" b="1">
-                <a:solidFill>
-                  <a:srgbClr val="000000"/>
-                </a:solidFill>
-                <a:latin typeface="Calibri"/>
-              </a:rPr>
-              <a:t>Coding</a:t>
+              <a:rPr sz="1000" b="1">
+                <a:solidFill>
+                  <a:srgbClr val="FF0000"/>
+                </a:solidFill>
+                <a:latin typeface="Calibri"/>
+              </a:rPr>
+              <a:t>English</a:t>
             </a:r>
           </a:p>
           <a:p>
@@ -5135,15 +4043,15 @@
                   <a:srgbClr val="0563C1"/>
                 </a:solidFill>
                 <a:latin typeface="Calibri"/>
-                <a:hlinkClick r:id="rId3"/>
-              </a:rPr>
-              <a:t>https://arena.ai/leaderboard/text/coding</a:t>
+                <a:hlinkClick r:id="rId2"/>
+              </a:rPr>
+              <a:t>https://arena.ai/leaderboard/text</a:t>
             </a:r>
           </a:p>
           <a:p>
             <a:pPr>
               <a:lnSpc>
-                <a:spcPts val="1300"/>
+                <a:spcPts val="1080"/>
               </a:lnSpc>
               <a:spcBef>
                 <a:spcPts val="0"/>
@@ -5153,7 +4061,7 @@
               </a:spcAft>
             </a:pPr>
             <a:r>
-              <a:rPr sz="1084" b="0">
+              <a:rPr sz="900" b="0">
                 <a:solidFill>
                   <a:srgbClr val="4472C4"/>
                 </a:solidFill>
@@ -5162,16 +4070,16 @@
               <a:t>■ </a:t>
             </a:r>
             <a:r>
-              <a:rPr sz="1084" b="1">
-                <a:solidFill>
-                  <a:srgbClr val="000000"/>
-                </a:solidFill>
-                <a:latin typeface="Calibri"/>
-              </a:rPr>
-              <a:t>1552  </a:t>
-            </a:r>
-            <a:r>
-              <a:rPr sz="1084" b="0">
+              <a:rPr sz="900" b="1">
+                <a:solidFill>
+                  <a:srgbClr val="000000"/>
+                </a:solidFill>
+                <a:latin typeface="Calibri"/>
+              </a:rPr>
+              <a:t>1506  </a:t>
+            </a:r>
+            <a:r>
+              <a:rPr sz="900" b="0">
                 <a:solidFill>
                   <a:srgbClr val="000000"/>
                 </a:solidFill>
@@ -5183,7 +4091,7 @@
           <a:p>
             <a:pPr>
               <a:lnSpc>
-                <a:spcPts val="1300"/>
+                <a:spcPts val="1080"/>
               </a:lnSpc>
               <a:spcBef>
                 <a:spcPts val="0"/>
@@ -5193,7 +4101,7 @@
               </a:spcAft>
             </a:pPr>
             <a:r>
-              <a:rPr sz="1084" b="0">
+              <a:rPr sz="900" b="0">
                 <a:solidFill>
                   <a:srgbClr val="4472C4"/>
                 </a:solidFill>
@@ -5202,28 +4110,28 @@
               <a:t>■ </a:t>
             </a:r>
             <a:r>
-              <a:rPr sz="1084" b="1">
-                <a:solidFill>
-                  <a:srgbClr val="000000"/>
-                </a:solidFill>
-                <a:latin typeface="Calibri"/>
-              </a:rPr>
-              <a:t>1552  </a:t>
-            </a:r>
-            <a:r>
-              <a:rPr sz="1084" b="0">
-                <a:solidFill>
-                  <a:srgbClr val="000000"/>
-                </a:solidFill>
-                <a:latin typeface="Calibri"/>
-              </a:rPr>
-              <a:t>claude-opus-4-7-high</a:t>
+              <a:rPr sz="900" b="1">
+                <a:solidFill>
+                  <a:srgbClr val="000000"/>
+                </a:solidFill>
+                <a:latin typeface="Calibri"/>
+              </a:rPr>
+              <a:t>1505  </a:t>
+            </a:r>
+            <a:r>
+              <a:rPr sz="900" b="0">
+                <a:solidFill>
+                  <a:srgbClr val="000000"/>
+                </a:solidFill>
+                <a:latin typeface="Calibri"/>
+              </a:rPr>
+              <a:t>claude-opus-4-6-high</a:t>
             </a:r>
           </a:p>
           <a:p>
             <a:pPr>
               <a:lnSpc>
-                <a:spcPts val="1300"/>
+                <a:spcPts val="1080"/>
               </a:lnSpc>
               <a:spcBef>
                 <a:spcPts val="0"/>
@@ -5233,7 +4141,7 @@
               </a:spcAft>
             </a:pPr>
             <a:r>
-              <a:rPr sz="1084" b="0">
+              <a:rPr sz="900" b="0">
                 <a:solidFill>
                   <a:srgbClr val="4472C4"/>
                 </a:solidFill>
@@ -5242,28 +4150,28 @@
               <a:t>■ </a:t>
             </a:r>
             <a:r>
-              <a:rPr sz="1084" b="1">
-                <a:solidFill>
-                  <a:srgbClr val="000000"/>
-                </a:solidFill>
-                <a:latin typeface="Calibri"/>
-              </a:rPr>
-              <a:t>1551  </a:t>
-            </a:r>
-            <a:r>
-              <a:rPr sz="1084" b="0">
-                <a:solidFill>
-                  <a:srgbClr val="000000"/>
-                </a:solidFill>
-                <a:latin typeface="Calibri"/>
-              </a:rPr>
-              <a:t>claude-opus-4-6-high</a:t>
+              <a:rPr sz="900" b="1">
+                <a:solidFill>
+                  <a:srgbClr val="000000"/>
+                </a:solidFill>
+                <a:latin typeface="Calibri"/>
+              </a:rPr>
+              <a:t>1502  </a:t>
+            </a:r>
+            <a:r>
+              <a:rPr sz="900" b="0">
+                <a:solidFill>
+                  <a:srgbClr val="000000"/>
+                </a:solidFill>
+                <a:latin typeface="Calibri"/>
+              </a:rPr>
+              <a:t>claude-opus-4-7-high</a:t>
             </a:r>
           </a:p>
           <a:p>
             <a:pPr>
               <a:lnSpc>
-                <a:spcPts val="1300"/>
+                <a:spcPts val="1080"/>
               </a:lnSpc>
               <a:spcBef>
                 <a:spcPts val="0"/>
@@ -5273,7 +4181,7 @@
               </a:spcAft>
             </a:pPr>
             <a:r>
-              <a:rPr sz="1084" b="0">
+              <a:rPr sz="900" b="0">
                 <a:solidFill>
                   <a:srgbClr val="4472C4"/>
                 </a:solidFill>
@@ -5282,28 +4190,28 @@
               <a:t>■ </a:t>
             </a:r>
             <a:r>
-              <a:rPr sz="1084" b="1">
-                <a:solidFill>
-                  <a:srgbClr val="000000"/>
-                </a:solidFill>
-                <a:latin typeface="Calibri"/>
-              </a:rPr>
-              <a:t>1547  </a:t>
-            </a:r>
-            <a:r>
-              <a:rPr sz="1084" b="0">
-                <a:solidFill>
-                  <a:srgbClr val="000000"/>
-                </a:solidFill>
-                <a:latin typeface="Calibri"/>
-              </a:rPr>
-              <a:t>claude-opus-4-7</a:t>
+              <a:rPr sz="900" b="1">
+                <a:solidFill>
+                  <a:srgbClr val="000000"/>
+                </a:solidFill>
+                <a:latin typeface="Calibri"/>
+              </a:rPr>
+              <a:t>1501  </a:t>
+            </a:r>
+            <a:r>
+              <a:rPr sz="900" b="0">
+                <a:solidFill>
+                  <a:srgbClr val="000000"/>
+                </a:solidFill>
+                <a:latin typeface="Calibri"/>
+              </a:rPr>
+              <a:t>claude-fable-5.1-max</a:t>
             </a:r>
           </a:p>
           <a:p>
             <a:pPr>
               <a:lnSpc>
-                <a:spcPts val="1300"/>
+                <a:spcPts val="1080"/>
               </a:lnSpc>
               <a:spcBef>
                 <a:spcPts val="0"/>
@@ -5313,37 +4221,37 @@
               </a:spcAft>
             </a:pPr>
             <a:r>
-              <a:rPr sz="1084" b="0">
-                <a:solidFill>
-                  <a:srgbClr val="4472C4"/>
+              <a:rPr sz="900" b="0">
+                <a:solidFill>
+                  <a:srgbClr val="A6A6A6"/>
                 </a:solidFill>
                 <a:latin typeface="Calibri"/>
               </a:rPr>
               <a:t>■ </a:t>
             </a:r>
             <a:r>
-              <a:rPr sz="1084" b="1">
-                <a:solidFill>
-                  <a:srgbClr val="000000"/>
-                </a:solidFill>
-                <a:latin typeface="Calibri"/>
-              </a:rPr>
-              <a:t>1546  </a:t>
-            </a:r>
-            <a:r>
-              <a:rPr sz="1084" b="0">
-                <a:solidFill>
-                  <a:srgbClr val="000000"/>
-                </a:solidFill>
-                <a:latin typeface="Calibri"/>
-              </a:rPr>
-              <a:t>claude-opus-4-6</a:t>
+              <a:rPr sz="900" b="1">
+                <a:solidFill>
+                  <a:srgbClr val="000000"/>
+                </a:solidFill>
+                <a:latin typeface="Calibri"/>
+              </a:rPr>
+              <a:t>1499  </a:t>
+            </a:r>
+            <a:r>
+              <a:rPr sz="900" b="0">
+                <a:solidFill>
+                  <a:srgbClr val="000000"/>
+                </a:solidFill>
+                <a:latin typeface="Calibri"/>
+              </a:rPr>
+              <a:t>muse-spark-1.2 (xHigh)</a:t>
             </a:r>
           </a:p>
           <a:p>
             <a:pPr>
               <a:lnSpc>
-                <a:spcPts val="1300"/>
+                <a:spcPts val="1080"/>
               </a:lnSpc>
               <a:spcBef>
                 <a:spcPts val="0"/>
@@ -5353,37 +4261,37 @@
               </a:spcAft>
             </a:pPr>
             <a:r>
-              <a:rPr sz="1084" b="0">
-                <a:solidFill>
-                  <a:srgbClr val="00B050"/>
+              <a:rPr sz="900" b="0">
+                <a:solidFill>
+                  <a:srgbClr val="4472C4"/>
                 </a:solidFill>
                 <a:latin typeface="Calibri"/>
               </a:rPr>
               <a:t>■ </a:t>
             </a:r>
             <a:r>
-              <a:rPr sz="1084" b="1">
-                <a:solidFill>
-                  <a:srgbClr val="000000"/>
-                </a:solidFill>
-                <a:latin typeface="Calibri"/>
-              </a:rPr>
-              <a:t>1538  </a:t>
-            </a:r>
-            <a:r>
-              <a:rPr sz="1084" b="0">
-                <a:solidFill>
-                  <a:srgbClr val="000000"/>
-                </a:solidFill>
-                <a:latin typeface="Calibri"/>
-              </a:rPr>
-              <a:t>kimi-k3-max</a:t>
+              <a:rPr sz="900" b="1">
+                <a:solidFill>
+                  <a:srgbClr val="000000"/>
+                </a:solidFill>
+                <a:latin typeface="Calibri"/>
+              </a:rPr>
+              <a:t>1497  </a:t>
+            </a:r>
+            <a:r>
+              <a:rPr sz="900" b="0">
+                <a:solidFill>
+                  <a:srgbClr val="000000"/>
+                </a:solidFill>
+                <a:latin typeface="Calibri"/>
+              </a:rPr>
+              <a:t>claude-opus-4-6</a:t>
             </a:r>
           </a:p>
           <a:p>
             <a:pPr>
               <a:lnSpc>
-                <a:spcPts val="1300"/>
+                <a:spcPts val="1080"/>
               </a:lnSpc>
               <a:spcBef>
                 <a:spcPts val="0"/>
@@ -5393,37 +4301,37 @@
               </a:spcAft>
             </a:pPr>
             <a:r>
-              <a:rPr sz="1084" b="0">
-                <a:solidFill>
-                  <a:srgbClr val="FFD700"/>
+              <a:rPr sz="900" b="0">
+                <a:solidFill>
+                  <a:srgbClr val="4472C4"/>
                 </a:solidFill>
                 <a:latin typeface="Calibri"/>
               </a:rPr>
               <a:t>■ </a:t>
             </a:r>
             <a:r>
-              <a:rPr sz="1084" b="1">
-                <a:solidFill>
-                  <a:srgbClr val="000000"/>
-                </a:solidFill>
-                <a:latin typeface="Calibri"/>
-              </a:rPr>
-              <a:t>1537  </a:t>
-            </a:r>
-            <a:r>
-              <a:rPr sz="1084" b="0">
-                <a:solidFill>
-                  <a:srgbClr val="000000"/>
-                </a:solidFill>
-                <a:latin typeface="Calibri"/>
-              </a:rPr>
-              <a:t>gpt-6-astra-max</a:t>
+              <a:rPr sz="900" b="1">
+                <a:solidFill>
+                  <a:srgbClr val="000000"/>
+                </a:solidFill>
+                <a:latin typeface="Calibri"/>
+              </a:rPr>
+              <a:t>1494  </a:t>
+            </a:r>
+            <a:r>
+              <a:rPr sz="900" b="0">
+                <a:solidFill>
+                  <a:srgbClr val="000000"/>
+                </a:solidFill>
+                <a:latin typeface="Calibri"/>
+              </a:rPr>
+              <a:t>claude-opus-4-7</a:t>
             </a:r>
           </a:p>
           <a:p>
             <a:pPr>
               <a:lnSpc>
-                <a:spcPts val="1300"/>
+                <a:spcPts val="1080"/>
               </a:lnSpc>
               <a:spcBef>
                 <a:spcPts val="0"/>
@@ -5433,37 +4341,37 @@
               </a:spcAft>
             </a:pPr>
             <a:r>
-              <a:rPr sz="1084" b="0">
-                <a:solidFill>
-                  <a:srgbClr val="FF0000"/>
+              <a:rPr sz="900" b="0">
+                <a:solidFill>
+                  <a:srgbClr val="A6A6A6"/>
                 </a:solidFill>
                 <a:latin typeface="Calibri"/>
               </a:rPr>
               <a:t>■ </a:t>
             </a:r>
             <a:r>
-              <a:rPr sz="1084" b="1">
-                <a:solidFill>
-                  <a:srgbClr val="000000"/>
-                </a:solidFill>
-                <a:latin typeface="Calibri"/>
-              </a:rPr>
-              <a:t>1535  </a:t>
-            </a:r>
-            <a:r>
-              <a:rPr sz="1084" b="0">
-                <a:solidFill>
-                  <a:srgbClr val="000000"/>
-                </a:solidFill>
-                <a:latin typeface="Calibri"/>
-              </a:rPr>
-              <a:t>gemini-3.8-flash-high</a:t>
+              <a:rPr sz="900" b="1">
+                <a:solidFill>
+                  <a:srgbClr val="000000"/>
+                </a:solidFill>
+                <a:latin typeface="Calibri"/>
+              </a:rPr>
+              <a:t>1494  </a:t>
+            </a:r>
+            <a:r>
+              <a:rPr sz="900" b="0">
+                <a:solidFill>
+                  <a:srgbClr val="000000"/>
+                </a:solidFill>
+                <a:latin typeface="Calibri"/>
+              </a:rPr>
+              <a:t>muse-spark-1.1</a:t>
             </a:r>
           </a:p>
           <a:p>
             <a:pPr>
               <a:lnSpc>
-                <a:spcPts val="1300"/>
+                <a:spcPts val="1080"/>
               </a:lnSpc>
               <a:spcBef>
                 <a:spcPts val="0"/>
@@ -5473,37 +4381,37 @@
               </a:spcAft>
             </a:pPr>
             <a:r>
-              <a:rPr sz="1084" b="0">
-                <a:solidFill>
-                  <a:srgbClr val="A6A6A6"/>
+              <a:rPr sz="900" b="0">
+                <a:solidFill>
+                  <a:srgbClr val="4472C4"/>
                 </a:solidFill>
                 <a:latin typeface="Calibri"/>
               </a:rPr>
               <a:t>■ </a:t>
             </a:r>
             <a:r>
-              <a:rPr sz="1084" b="1">
-                <a:solidFill>
-                  <a:srgbClr val="000000"/>
-                </a:solidFill>
-                <a:latin typeface="Calibri"/>
-              </a:rPr>
-              <a:t>1535  </a:t>
-            </a:r>
-            <a:r>
-              <a:rPr sz="1084" b="0">
-                <a:solidFill>
-                  <a:srgbClr val="000000"/>
-                </a:solidFill>
-                <a:latin typeface="Calibri"/>
-              </a:rPr>
-              <a:t>muse-spark-1.2 (xHigh)</a:t>
+              <a:rPr sz="900" b="1">
+                <a:solidFill>
+                  <a:srgbClr val="000000"/>
+                </a:solidFill>
+                <a:latin typeface="Calibri"/>
+              </a:rPr>
+              <a:t>1493  </a:t>
+            </a:r>
+            <a:r>
+              <a:rPr sz="900" b="0">
+                <a:solidFill>
+                  <a:srgbClr val="000000"/>
+                </a:solidFill>
+                <a:latin typeface="Calibri"/>
+              </a:rPr>
+              <a:t>claude-opus-5-high</a:t>
             </a:r>
           </a:p>
           <a:p>
             <a:pPr>
               <a:lnSpc>
-                <a:spcPts val="1300"/>
+                <a:spcPts val="1080"/>
               </a:lnSpc>
               <a:spcBef>
                 <a:spcPts val="0"/>
@@ -5513,37 +4421,37 @@
               </a:spcAft>
             </a:pPr>
             <a:r>
-              <a:rPr sz="1084" b="0">
-                <a:solidFill>
-                  <a:srgbClr val="4472C4"/>
+              <a:rPr sz="900" b="0">
+                <a:solidFill>
+                  <a:srgbClr val="FF0000"/>
                 </a:solidFill>
                 <a:latin typeface="Calibri"/>
               </a:rPr>
               <a:t>■ </a:t>
             </a:r>
             <a:r>
-              <a:rPr sz="1084" b="1">
-                <a:solidFill>
-                  <a:srgbClr val="000000"/>
-                </a:solidFill>
-                <a:latin typeface="Calibri"/>
-              </a:rPr>
-              <a:t>1534  </a:t>
-            </a:r>
-            <a:r>
-              <a:rPr sz="1084" b="0">
-                <a:solidFill>
-                  <a:srgbClr val="000000"/>
-                </a:solidFill>
-                <a:latin typeface="Calibri"/>
-              </a:rPr>
-              <a:t>claude-opus-4-8-high</a:t>
+              <a:rPr sz="900" b="1">
+                <a:solidFill>
+                  <a:srgbClr val="000000"/>
+                </a:solidFill>
+                <a:latin typeface="Calibri"/>
+              </a:rPr>
+              <a:t>1493  </a:t>
+            </a:r>
+            <a:r>
+              <a:rPr sz="900" b="0">
+                <a:solidFill>
+                  <a:srgbClr val="000000"/>
+                </a:solidFill>
+                <a:latin typeface="Calibri"/>
+              </a:rPr>
+              <a:t>gemini-3.8-flash-high</a:t>
             </a:r>
           </a:p>
           <a:p>
             <a:pPr>
               <a:lnSpc>
-                <a:spcPts val="1300"/>
+                <a:spcPts val="1080"/>
               </a:lnSpc>
               <a:spcBef>
                 <a:spcPts val="0"/>
@@ -5553,37 +4461,37 @@
               </a:spcAft>
             </a:pPr>
             <a:r>
-              <a:rPr sz="1084" b="0">
-                <a:solidFill>
-                  <a:srgbClr val="4472C4"/>
+              <a:rPr sz="900" b="0">
+                <a:solidFill>
+                  <a:srgbClr val="FF0000"/>
                 </a:solidFill>
                 <a:latin typeface="Calibri"/>
               </a:rPr>
               <a:t>■ </a:t>
             </a:r>
             <a:r>
-              <a:rPr sz="1084" b="1">
-                <a:solidFill>
-                  <a:srgbClr val="000000"/>
-                </a:solidFill>
-                <a:latin typeface="Calibri"/>
-              </a:rPr>
-              <a:t>1533  </a:t>
-            </a:r>
-            <a:r>
-              <a:rPr sz="1084" b="0">
-                <a:solidFill>
-                  <a:srgbClr val="000000"/>
-                </a:solidFill>
-                <a:latin typeface="Calibri"/>
-              </a:rPr>
-              <a:t>claude-opus-5-high</a:t>
+              <a:rPr sz="900" b="1">
+                <a:solidFill>
+                  <a:srgbClr val="000000"/>
+                </a:solidFill>
+                <a:latin typeface="Calibri"/>
+              </a:rPr>
+              <a:t>1490  </a:t>
+            </a:r>
+            <a:r>
+              <a:rPr sz="900" b="0">
+                <a:solidFill>
+                  <a:srgbClr val="000000"/>
+                </a:solidFill>
+                <a:latin typeface="Calibri"/>
+              </a:rPr>
+              <a:t>gemini-3.7-flash-high</a:t>
             </a:r>
           </a:p>
           <a:p>
             <a:pPr>
               <a:lnSpc>
-                <a:spcPts val="1300"/>
+                <a:spcPts val="1080"/>
               </a:lnSpc>
               <a:spcBef>
                 <a:spcPts val="0"/>
@@ -5593,7 +4501,7 @@
               </a:spcAft>
             </a:pPr>
             <a:r>
-              <a:rPr sz="1084" b="0">
+              <a:rPr sz="900" b="0">
                 <a:solidFill>
                   <a:srgbClr val="A6A6A6"/>
                 </a:solidFill>
@@ -5602,28 +4510,28 @@
               <a:t>■ </a:t>
             </a:r>
             <a:r>
-              <a:rPr sz="1084" b="1">
-                <a:solidFill>
-                  <a:srgbClr val="000000"/>
-                </a:solidFill>
-                <a:latin typeface="Calibri"/>
-              </a:rPr>
-              <a:t>1532  </a:t>
-            </a:r>
-            <a:r>
-              <a:rPr sz="1084" b="0">
-                <a:solidFill>
-                  <a:srgbClr val="000000"/>
-                </a:solidFill>
-                <a:latin typeface="Calibri"/>
-              </a:rPr>
-              <a:t>muse-spark-1.1</a:t>
+              <a:rPr sz="900" b="1">
+                <a:solidFill>
+                  <a:srgbClr val="000000"/>
+                </a:solidFill>
+                <a:latin typeface="Calibri"/>
+              </a:rPr>
+              <a:t>1488  </a:t>
+            </a:r>
+            <a:r>
+              <a:rPr sz="900" b="0">
+                <a:solidFill>
+                  <a:srgbClr val="000000"/>
+                </a:solidFill>
+                <a:latin typeface="Calibri"/>
+              </a:rPr>
+              <a:t>muse-spark</a:t>
             </a:r>
           </a:p>
           <a:p>
             <a:pPr>
               <a:lnSpc>
-                <a:spcPts val="1300"/>
+                <a:spcPts val="1080"/>
               </a:lnSpc>
               <a:spcBef>
                 <a:spcPts val="0"/>
@@ -5633,37 +4541,37 @@
               </a:spcAft>
             </a:pPr>
             <a:r>
-              <a:rPr sz="1084" b="0">
-                <a:solidFill>
-                  <a:srgbClr val="4472C4"/>
+              <a:rPr sz="900" b="0">
+                <a:solidFill>
+                  <a:srgbClr val="FF0000"/>
                 </a:solidFill>
                 <a:latin typeface="Calibri"/>
               </a:rPr>
               <a:t>■ </a:t>
             </a:r>
             <a:r>
-              <a:rPr sz="1084" b="1">
-                <a:solidFill>
-                  <a:srgbClr val="000000"/>
-                </a:solidFill>
-                <a:latin typeface="Calibri"/>
-              </a:rPr>
-              <a:t>1530  </a:t>
-            </a:r>
-            <a:r>
-              <a:rPr sz="1084" b="0">
-                <a:solidFill>
-                  <a:srgbClr val="000000"/>
-                </a:solidFill>
-                <a:latin typeface="Calibri"/>
-              </a:rPr>
-              <a:t>claude-opus-4-5-20251101-high-32k</a:t>
+              <a:rPr sz="900" b="1">
+                <a:solidFill>
+                  <a:srgbClr val="000000"/>
+                </a:solidFill>
+                <a:latin typeface="Calibri"/>
+              </a:rPr>
+              <a:t>1487  </a:t>
+            </a:r>
+            <a:r>
+              <a:rPr sz="900" b="0">
+                <a:solidFill>
+                  <a:srgbClr val="000000"/>
+                </a:solidFill>
+                <a:latin typeface="Calibri"/>
+              </a:rPr>
+              <a:t>gemini-3.1-pro-preview</a:t>
             </a:r>
           </a:p>
           <a:p>
             <a:pPr>
               <a:lnSpc>
-                <a:spcPts val="1300"/>
+                <a:spcPts val="1080"/>
               </a:lnSpc>
               <a:spcBef>
                 <a:spcPts val="0"/>
@@ -5673,7 +4581,7 @@
               </a:spcAft>
             </a:pPr>
             <a:r>
-              <a:rPr sz="1084" b="0">
+              <a:rPr sz="900" b="0">
                 <a:solidFill>
                   <a:srgbClr val="4472C4"/>
                 </a:solidFill>
@@ -5682,28 +4590,28 @@
               <a:t>■ </a:t>
             </a:r>
             <a:r>
-              <a:rPr sz="1084" b="1">
-                <a:solidFill>
-                  <a:srgbClr val="000000"/>
-                </a:solidFill>
-                <a:latin typeface="Calibri"/>
-              </a:rPr>
-              <a:t>1529  </a:t>
-            </a:r>
-            <a:r>
-              <a:rPr sz="1084" b="0">
-                <a:solidFill>
-                  <a:srgbClr val="000000"/>
-                </a:solidFill>
-                <a:latin typeface="Calibri"/>
-              </a:rPr>
-              <a:t>claude-opus-4-8</a:t>
+              <a:rPr sz="900" b="1">
+                <a:solidFill>
+                  <a:srgbClr val="000000"/>
+                </a:solidFill>
+                <a:latin typeface="Calibri"/>
+              </a:rPr>
+              <a:t>1487  </a:t>
+            </a:r>
+            <a:r>
+              <a:rPr sz="900" b="0">
+                <a:solidFill>
+                  <a:srgbClr val="000000"/>
+                </a:solidFill>
+                <a:latin typeface="Calibri"/>
+              </a:rPr>
+              <a:t>claude-opus-5-max</a:t>
             </a:r>
           </a:p>
           <a:p>
             <a:pPr>
               <a:lnSpc>
-                <a:spcPts val="1300"/>
+                <a:spcPts val="1080"/>
               </a:lnSpc>
               <a:spcBef>
                 <a:spcPts val="0"/>
@@ -5713,37 +4621,37 @@
               </a:spcAft>
             </a:pPr>
             <a:r>
-              <a:rPr sz="1084" b="0">
-                <a:solidFill>
-                  <a:srgbClr val="4472C4"/>
+              <a:rPr sz="900" b="0">
+                <a:solidFill>
+                  <a:srgbClr val="00B050"/>
                 </a:solidFill>
                 <a:latin typeface="Calibri"/>
               </a:rPr>
               <a:t>■ </a:t>
             </a:r>
             <a:r>
-              <a:rPr sz="1084" b="1">
-                <a:solidFill>
-                  <a:srgbClr val="000000"/>
-                </a:solidFill>
-                <a:latin typeface="Calibri"/>
-              </a:rPr>
-              <a:t>1528  </a:t>
-            </a:r>
-            <a:r>
-              <a:rPr sz="1084" b="0">
-                <a:solidFill>
-                  <a:srgbClr val="000000"/>
-                </a:solidFill>
-                <a:latin typeface="Calibri"/>
-              </a:rPr>
-              <a:t>claude-sonnet-4-6</a:t>
+              <a:rPr sz="900" b="1">
+                <a:solidFill>
+                  <a:srgbClr val="000000"/>
+                </a:solidFill>
+                <a:latin typeface="Calibri"/>
+              </a:rPr>
+              <a:t>1486  </a:t>
+            </a:r>
+            <a:r>
+              <a:rPr sz="900" b="0">
+                <a:solidFill>
+                  <a:srgbClr val="000000"/>
+                </a:solidFill>
+                <a:latin typeface="Calibri"/>
+              </a:rPr>
+              <a:t>glm-5.3-max</a:t>
             </a:r>
           </a:p>
           <a:p>
             <a:pPr>
               <a:lnSpc>
-                <a:spcPts val="1300"/>
+                <a:spcPts val="1080"/>
               </a:lnSpc>
               <a:spcBef>
                 <a:spcPts val="0"/>
@@ -5753,37 +4661,37 @@
               </a:spcAft>
             </a:pPr>
             <a:r>
-              <a:rPr sz="1084" b="0">
-                <a:solidFill>
-                  <a:srgbClr val="FFD700"/>
+              <a:rPr sz="900" b="0">
+                <a:solidFill>
+                  <a:srgbClr val="FF0000"/>
                 </a:solidFill>
                 <a:latin typeface="Calibri"/>
               </a:rPr>
               <a:t>■ </a:t>
             </a:r>
             <a:r>
-              <a:rPr sz="1084" b="1">
-                <a:solidFill>
-                  <a:srgbClr val="000000"/>
-                </a:solidFill>
-                <a:latin typeface="Calibri"/>
-              </a:rPr>
-              <a:t>1527  </a:t>
-            </a:r>
-            <a:r>
-              <a:rPr sz="1084" b="0">
-                <a:solidFill>
-                  <a:srgbClr val="000000"/>
-                </a:solidFill>
-                <a:latin typeface="Calibri"/>
-              </a:rPr>
-              <a:t>gpt-5.6-sol-xhigh</a:t>
+              <a:rPr sz="900" b="1">
+                <a:solidFill>
+                  <a:srgbClr val="000000"/>
+                </a:solidFill>
+                <a:latin typeface="Calibri"/>
+              </a:rPr>
+              <a:t>1486  </a:t>
+            </a:r>
+            <a:r>
+              <a:rPr sz="900" b="0">
+                <a:solidFill>
+                  <a:srgbClr val="000000"/>
+                </a:solidFill>
+                <a:latin typeface="Calibri"/>
+              </a:rPr>
+              <a:t>gemini-3-pro</a:t>
             </a:r>
           </a:p>
           <a:p>
             <a:pPr>
               <a:lnSpc>
-                <a:spcPts val="1300"/>
+                <a:spcPts val="1080"/>
               </a:lnSpc>
               <a:spcBef>
                 <a:spcPts val="0"/>
@@ -5793,37 +4701,37 @@
               </a:spcAft>
             </a:pPr>
             <a:r>
-              <a:rPr sz="1084" b="0">
-                <a:solidFill>
-                  <a:srgbClr val="4472C4"/>
+              <a:rPr sz="900" b="0">
+                <a:solidFill>
+                  <a:srgbClr val="00B050"/>
                 </a:solidFill>
                 <a:latin typeface="Calibri"/>
               </a:rPr>
               <a:t>■ </a:t>
             </a:r>
             <a:r>
-              <a:rPr sz="1084" b="1">
-                <a:solidFill>
-                  <a:srgbClr val="000000"/>
-                </a:solidFill>
-                <a:latin typeface="Calibri"/>
-              </a:rPr>
-              <a:t>1526  </a:t>
-            </a:r>
-            <a:r>
-              <a:rPr sz="1084" b="0">
-                <a:solidFill>
-                  <a:srgbClr val="000000"/>
-                </a:solidFill>
-                <a:latin typeface="Calibri"/>
-              </a:rPr>
-              <a:t>claude-opus-5-max</a:t>
+              <a:rPr sz="900" b="1">
+                <a:solidFill>
+                  <a:srgbClr val="000000"/>
+                </a:solidFill>
+                <a:latin typeface="Calibri"/>
+              </a:rPr>
+              <a:t>1485  </a:t>
+            </a:r>
+            <a:r>
+              <a:rPr sz="900" b="0">
+                <a:solidFill>
+                  <a:srgbClr val="000000"/>
+                </a:solidFill>
+                <a:latin typeface="Calibri"/>
+              </a:rPr>
+              <a:t>kimi-k3-max</a:t>
             </a:r>
           </a:p>
           <a:p>
             <a:pPr>
               <a:lnSpc>
-                <a:spcPts val="1300"/>
+                <a:spcPts val="1080"/>
               </a:lnSpc>
               <a:spcBef>
                 <a:spcPts val="0"/>
@@ -5833,37 +4741,37 @@
               </a:spcAft>
             </a:pPr>
             <a:r>
-              <a:rPr sz="1084" b="0">
-                <a:solidFill>
-                  <a:srgbClr val="A6A6A6"/>
+              <a:rPr sz="900" b="0">
+                <a:solidFill>
+                  <a:srgbClr val="4472C4"/>
                 </a:solidFill>
                 <a:latin typeface="Calibri"/>
               </a:rPr>
               <a:t>■ </a:t>
             </a:r>
             <a:r>
-              <a:rPr sz="1084" b="1">
-                <a:solidFill>
-                  <a:srgbClr val="000000"/>
-                </a:solidFill>
-                <a:latin typeface="Calibri"/>
-              </a:rPr>
-              <a:t>1526  </a:t>
-            </a:r>
-            <a:r>
-              <a:rPr sz="1084" b="0">
-                <a:solidFill>
-                  <a:srgbClr val="000000"/>
-                </a:solidFill>
-                <a:latin typeface="Calibri"/>
-              </a:rPr>
-              <a:t>muse-spark</a:t>
+              <a:rPr sz="900" b="1">
+                <a:solidFill>
+                  <a:srgbClr val="000000"/>
+                </a:solidFill>
+                <a:latin typeface="Calibri"/>
+              </a:rPr>
+              <a:t>1482  </a:t>
+            </a:r>
+            <a:r>
+              <a:rPr sz="900" b="0">
+                <a:solidFill>
+                  <a:srgbClr val="000000"/>
+                </a:solidFill>
+                <a:latin typeface="Calibri"/>
+              </a:rPr>
+              <a:t>claude-opus-4-8-high</a:t>
             </a:r>
           </a:p>
           <a:p>
             <a:pPr>
               <a:lnSpc>
-                <a:spcPts val="1300"/>
+                <a:spcPts val="1080"/>
               </a:lnSpc>
               <a:spcBef>
                 <a:spcPts val="0"/>
@@ -5873,37 +4781,37 @@
               </a:spcAft>
             </a:pPr>
             <a:r>
-              <a:rPr sz="1084" b="0">
-                <a:solidFill>
-                  <a:srgbClr val="00B050"/>
+              <a:rPr sz="900" b="0">
+                <a:solidFill>
+                  <a:srgbClr val="FFD700"/>
                 </a:solidFill>
                 <a:latin typeface="Calibri"/>
               </a:rPr>
               <a:t>■ </a:t>
             </a:r>
             <a:r>
-              <a:rPr sz="1084" b="1">
-                <a:solidFill>
-                  <a:srgbClr val="000000"/>
-                </a:solidFill>
-                <a:latin typeface="Calibri"/>
-              </a:rPr>
-              <a:t>1526  </a:t>
-            </a:r>
-            <a:r>
-              <a:rPr sz="1084" b="0">
-                <a:solidFill>
-                  <a:srgbClr val="000000"/>
-                </a:solidFill>
-                <a:latin typeface="Calibri"/>
-              </a:rPr>
-              <a:t>glm-5.3-max</a:t>
+              <a:rPr sz="900" b="1">
+                <a:solidFill>
+                  <a:srgbClr val="000000"/>
+                </a:solidFill>
+                <a:latin typeface="Calibri"/>
+              </a:rPr>
+              <a:t>1482  </a:t>
+            </a:r>
+            <a:r>
+              <a:rPr sz="900" b="0">
+                <a:solidFill>
+                  <a:srgbClr val="000000"/>
+                </a:solidFill>
+                <a:latin typeface="Calibri"/>
+              </a:rPr>
+              <a:t>gpt-5.6-sol-xhigh</a:t>
             </a:r>
           </a:p>
           <a:p>
             <a:pPr>
               <a:lnSpc>
-                <a:spcPts val="1300"/>
+                <a:spcPts val="1080"/>
               </a:lnSpc>
               <a:spcBef>
                 <a:spcPts val="0"/>
@@ -5913,37 +4821,37 @@
               </a:spcAft>
             </a:pPr>
             <a:r>
-              <a:rPr sz="1084" b="0">
-                <a:solidFill>
-                  <a:srgbClr val="00B050"/>
+              <a:rPr sz="900" b="0">
+                <a:solidFill>
+                  <a:srgbClr val="FFD700"/>
                 </a:solidFill>
                 <a:latin typeface="Calibri"/>
               </a:rPr>
               <a:t>■ </a:t>
             </a:r>
             <a:r>
-              <a:rPr sz="1084" b="1">
-                <a:solidFill>
-                  <a:srgbClr val="000000"/>
-                </a:solidFill>
-                <a:latin typeface="Calibri"/>
-              </a:rPr>
-              <a:t>1525  </a:t>
-            </a:r>
-            <a:r>
-              <a:rPr sz="1084" b="0">
-                <a:solidFill>
-                  <a:srgbClr val="000000"/>
-                </a:solidFill>
-                <a:latin typeface="Calibri"/>
-              </a:rPr>
-              <a:t>qwen3.7-max-preview</a:t>
+              <a:rPr sz="900" b="1">
+                <a:solidFill>
+                  <a:srgbClr val="000000"/>
+                </a:solidFill>
+                <a:latin typeface="Calibri"/>
+              </a:rPr>
+              <a:t>1482  </a:t>
+            </a:r>
+            <a:r>
+              <a:rPr sz="900" b="0">
+                <a:solidFill>
+                  <a:srgbClr val="000000"/>
+                </a:solidFill>
+                <a:latin typeface="Calibri"/>
+              </a:rPr>
+              <a:t>gpt-5.5-high</a:t>
             </a:r>
           </a:p>
           <a:p>
             <a:pPr>
               <a:lnSpc>
-                <a:spcPts val="1300"/>
+                <a:spcPts val="1080"/>
               </a:lnSpc>
               <a:spcBef>
                 <a:spcPts val="0"/>
@@ -5953,7 +4861,7 @@
               </a:spcAft>
             </a:pPr>
             <a:r>
-              <a:rPr sz="1084" b="0">
+              <a:rPr sz="900" b="0">
                 <a:solidFill>
                   <a:srgbClr val="00B050"/>
                 </a:solidFill>
@@ -5962,28 +4870,28 @@
               <a:t>■ </a:t>
             </a:r>
             <a:r>
-              <a:rPr sz="1084" b="1">
-                <a:solidFill>
-                  <a:srgbClr val="000000"/>
-                </a:solidFill>
-                <a:latin typeface="Calibri"/>
-              </a:rPr>
-              <a:t>1524  </a:t>
-            </a:r>
-            <a:r>
-              <a:rPr sz="1084" b="0">
-                <a:solidFill>
-                  <a:srgbClr val="000000"/>
-                </a:solidFill>
-                <a:latin typeface="Calibri"/>
-              </a:rPr>
-              <a:t>glm-5.3-flash</a:t>
+              <a:rPr sz="900" b="1">
+                <a:solidFill>
+                  <a:srgbClr val="000000"/>
+                </a:solidFill>
+                <a:latin typeface="Calibri"/>
+              </a:rPr>
+              <a:t>1481  </a:t>
+            </a:r>
+            <a:r>
+              <a:rPr sz="900" b="0">
+                <a:solidFill>
+                  <a:srgbClr val="000000"/>
+                </a:solidFill>
+                <a:latin typeface="Calibri"/>
+              </a:rPr>
+              <a:t>qwen3.8-max</a:t>
             </a:r>
           </a:p>
           <a:p>
             <a:pPr>
               <a:lnSpc>
-                <a:spcPts val="1300"/>
+                <a:spcPts val="1080"/>
               </a:lnSpc>
               <a:spcBef>
                 <a:spcPts val="0"/>
@@ -5993,37 +4901,37 @@
               </a:spcAft>
             </a:pPr>
             <a:r>
-              <a:rPr sz="1084" b="0">
-                <a:solidFill>
-                  <a:srgbClr val="4472C4"/>
+              <a:rPr sz="900" b="0">
+                <a:solidFill>
+                  <a:srgbClr val="FF0000"/>
                 </a:solidFill>
                 <a:latin typeface="Calibri"/>
               </a:rPr>
               <a:t>■ </a:t>
             </a:r>
             <a:r>
-              <a:rPr sz="1084" b="1">
-                <a:solidFill>
-                  <a:srgbClr val="000000"/>
-                </a:solidFill>
-                <a:latin typeface="Calibri"/>
-              </a:rPr>
-              <a:t>1523  </a:t>
-            </a:r>
-            <a:r>
-              <a:rPr sz="1084" b="0">
-                <a:solidFill>
-                  <a:srgbClr val="000000"/>
-                </a:solidFill>
-                <a:latin typeface="Calibri"/>
-              </a:rPr>
-              <a:t>claude-opus-4-5-20251101</a:t>
+              <a:rPr sz="900" b="1">
+                <a:solidFill>
+                  <a:srgbClr val="000000"/>
+                </a:solidFill>
+                <a:latin typeface="Calibri"/>
+              </a:rPr>
+              <a:t>1479  </a:t>
+            </a:r>
+            <a:r>
+              <a:rPr sz="900" b="0">
+                <a:solidFill>
+                  <a:srgbClr val="000000"/>
+                </a:solidFill>
+                <a:latin typeface="Calibri"/>
+              </a:rPr>
+              <a:t>gemini-3.6-flash-high</a:t>
             </a:r>
           </a:p>
           <a:p>
             <a:pPr>
               <a:lnSpc>
-                <a:spcPts val="1300"/>
+                <a:spcPts val="1080"/>
               </a:lnSpc>
               <a:spcBef>
                 <a:spcPts val="0"/>
@@ -6033,37 +4941,37 @@
               </a:spcAft>
             </a:pPr>
             <a:r>
-              <a:rPr sz="1084" b="0">
-                <a:solidFill>
-                  <a:srgbClr val="00B050"/>
+              <a:rPr sz="900" b="0">
+                <a:solidFill>
+                  <a:srgbClr val="FF0000"/>
                 </a:solidFill>
                 <a:latin typeface="Calibri"/>
               </a:rPr>
               <a:t>■ </a:t>
             </a:r>
             <a:r>
-              <a:rPr sz="1084" b="1">
-                <a:solidFill>
-                  <a:srgbClr val="000000"/>
-                </a:solidFill>
-                <a:latin typeface="Calibri"/>
-              </a:rPr>
-              <a:t>1522  </a:t>
-            </a:r>
-            <a:r>
-              <a:rPr sz="1084" b="0">
-                <a:solidFill>
-                  <a:srgbClr val="000000"/>
-                </a:solidFill>
-                <a:latin typeface="Calibri"/>
-              </a:rPr>
-              <a:t>qwen3.8-max</a:t>
+              <a:rPr sz="900" b="1">
+                <a:solidFill>
+                  <a:srgbClr val="000000"/>
+                </a:solidFill>
+                <a:latin typeface="Calibri"/>
+              </a:rPr>
+              <a:t>1478  </a:t>
+            </a:r>
+            <a:r>
+              <a:rPr sz="900" b="0">
+                <a:solidFill>
+                  <a:srgbClr val="000000"/>
+                </a:solidFill>
+                <a:latin typeface="Calibri"/>
+              </a:rPr>
+              <a:t>gemini-3.5-flash-high</a:t>
             </a:r>
           </a:p>
           <a:p>
             <a:pPr>
               <a:lnSpc>
-                <a:spcPts val="1300"/>
+                <a:spcPts val="1080"/>
               </a:lnSpc>
               <a:spcBef>
                 <a:spcPts val="0"/>
@@ -6073,37 +4981,37 @@
               </a:spcAft>
             </a:pPr>
             <a:r>
-              <a:rPr sz="1084" b="0">
-                <a:solidFill>
-                  <a:srgbClr val="FF0000"/>
+              <a:rPr sz="900" b="0">
+                <a:solidFill>
+                  <a:srgbClr val="FFD700"/>
                 </a:solidFill>
                 <a:latin typeface="Calibri"/>
               </a:rPr>
               <a:t>■ </a:t>
             </a:r>
             <a:r>
-              <a:rPr sz="1084" b="1">
-                <a:solidFill>
-                  <a:srgbClr val="000000"/>
-                </a:solidFill>
-                <a:latin typeface="Calibri"/>
-              </a:rPr>
-              <a:t>1522  </a:t>
-            </a:r>
-            <a:r>
-              <a:rPr sz="1084" b="0">
-                <a:solidFill>
-                  <a:srgbClr val="000000"/>
-                </a:solidFill>
-                <a:latin typeface="Calibri"/>
-              </a:rPr>
-              <a:t>gemini-3.7-flash-high</a:t>
+              <a:rPr sz="900" b="1">
+                <a:solidFill>
+                  <a:srgbClr val="000000"/>
+                </a:solidFill>
+                <a:latin typeface="Calibri"/>
+              </a:rPr>
+              <a:t>1478  </a:t>
+            </a:r>
+            <a:r>
+              <a:rPr sz="900" b="0">
+                <a:solidFill>
+                  <a:srgbClr val="000000"/>
+                </a:solidFill>
+                <a:latin typeface="Calibri"/>
+              </a:rPr>
+              <a:t>gpt-6-astra-max</a:t>
             </a:r>
           </a:p>
           <a:p>
             <a:pPr>
               <a:lnSpc>
-                <a:spcPts val="1300"/>
+                <a:spcPts val="1080"/>
               </a:lnSpc>
               <a:spcBef>
                 <a:spcPts val="0"/>
@@ -6113,7 +5021,442 @@
               </a:spcAft>
             </a:pPr>
             <a:r>
-              <a:rPr sz="1084" b="0">
+              <a:rPr sz="900" b="0">
+                <a:solidFill>
+                  <a:srgbClr val="FFD700"/>
+                </a:solidFill>
+                <a:latin typeface="Calibri"/>
+              </a:rPr>
+              <a:t>■ </a:t>
+            </a:r>
+            <a:r>
+              <a:rPr sz="900" b="1">
+                <a:solidFill>
+                  <a:srgbClr val="000000"/>
+                </a:solidFill>
+                <a:latin typeface="Calibri"/>
+              </a:rPr>
+              <a:t>1476  </a:t>
+            </a:r>
+            <a:r>
+              <a:rPr sz="900" b="0">
+                <a:solidFill>
+                  <a:srgbClr val="000000"/>
+                </a:solidFill>
+                <a:latin typeface="Calibri"/>
+              </a:rPr>
+              <a:t>gpt-5.4-high</a:t>
+            </a:r>
+          </a:p>
+        </p:txBody>
+      </p:sp>
+      <p:sp>
+        <p:nvSpPr>
+          <p:cNvPr id="6" name="TextBox 5"/>
+          <p:cNvSpPr txBox="1"/>
+          <p:nvPr/>
+        </p:nvSpPr>
+        <p:spPr>
+          <a:xfrm>
+            <a:off x="4505444" y="658368"/>
+            <a:ext cx="2213095" cy="3773423"/>
+          </a:xfrm>
+          <a:prstGeom prst="rect">
+            <a:avLst/>
+          </a:prstGeom>
+          <a:solidFill>
+            <a:srgbClr val="FFF2CC"/>
+          </a:solidFill>
+          <a:ln w="9525">
+            <a:solidFill>
+              <a:srgbClr val="FF0000"/>
+            </a:solidFill>
+          </a:ln>
+        </p:spPr>
+        <p:txBody>
+          <a:bodyPr wrap="none" lIns="45720" rIns="45720" tIns="18288" bIns="18288">
+            <a:spAutoFit/>
+          </a:bodyPr>
+          <a:lstStyle/>
+          <a:p>
+            <a:pPr>
+              <a:lnSpc>
+                <a:spcPts val="1200"/>
+              </a:lnSpc>
+              <a:spcBef>
+                <a:spcPts val="0"/>
+              </a:spcBef>
+              <a:spcAft>
+                <a:spcPts val="0"/>
+              </a:spcAft>
+            </a:pPr>
+            <a:r>
+              <a:rPr sz="1000" b="1">
+                <a:solidFill>
+                  <a:srgbClr val="FF0000"/>
+                </a:solidFill>
+                <a:latin typeface="Calibri"/>
+              </a:rPr>
+              <a:t>Coding</a:t>
+            </a:r>
+          </a:p>
+          <a:p>
+            <a:pPr>
+              <a:lnSpc>
+                <a:spcPts val="1080"/>
+              </a:lnSpc>
+              <a:spcBef>
+                <a:spcPts val="0"/>
+              </a:spcBef>
+              <a:spcAft>
+                <a:spcPts val="0"/>
+              </a:spcAft>
+            </a:pPr>
+            <a:r>
+              <a:rPr sz="900" b="0">
+                <a:solidFill>
+                  <a:srgbClr val="0563C1"/>
+                </a:solidFill>
+                <a:latin typeface="Calibri"/>
+                <a:hlinkClick r:id="rId3"/>
+              </a:rPr>
+              <a:t>https://arena.ai/leaderboard/text/coding</a:t>
+            </a:r>
+          </a:p>
+          <a:p>
+            <a:pPr>
+              <a:lnSpc>
+                <a:spcPts val="1080"/>
+              </a:lnSpc>
+              <a:spcBef>
+                <a:spcPts val="0"/>
+              </a:spcBef>
+              <a:spcAft>
+                <a:spcPts val="0"/>
+              </a:spcAft>
+            </a:pPr>
+            <a:r>
+              <a:rPr sz="900" b="0">
+                <a:solidFill>
+                  <a:srgbClr val="4472C4"/>
+                </a:solidFill>
+                <a:latin typeface="Calibri"/>
+              </a:rPr>
+              <a:t>■ </a:t>
+            </a:r>
+            <a:r>
+              <a:rPr sz="900" b="1">
+                <a:solidFill>
+                  <a:srgbClr val="000000"/>
+                </a:solidFill>
+                <a:latin typeface="Calibri"/>
+              </a:rPr>
+              <a:t>1552  </a:t>
+            </a:r>
+            <a:r>
+              <a:rPr sz="900" b="0">
+                <a:solidFill>
+                  <a:srgbClr val="000000"/>
+                </a:solidFill>
+                <a:latin typeface="Calibri"/>
+              </a:rPr>
+              <a:t>claude-fable-5</a:t>
+            </a:r>
+          </a:p>
+          <a:p>
+            <a:pPr>
+              <a:lnSpc>
+                <a:spcPts val="1080"/>
+              </a:lnSpc>
+              <a:spcBef>
+                <a:spcPts val="0"/>
+              </a:spcBef>
+              <a:spcAft>
+                <a:spcPts val="0"/>
+              </a:spcAft>
+            </a:pPr>
+            <a:r>
+              <a:rPr sz="900" b="0">
+                <a:solidFill>
+                  <a:srgbClr val="4472C4"/>
+                </a:solidFill>
+                <a:latin typeface="Calibri"/>
+              </a:rPr>
+              <a:t>■ </a:t>
+            </a:r>
+            <a:r>
+              <a:rPr sz="900" b="1">
+                <a:solidFill>
+                  <a:srgbClr val="000000"/>
+                </a:solidFill>
+                <a:latin typeface="Calibri"/>
+              </a:rPr>
+              <a:t>1552  </a:t>
+            </a:r>
+            <a:r>
+              <a:rPr sz="900" b="0">
+                <a:solidFill>
+                  <a:srgbClr val="000000"/>
+                </a:solidFill>
+                <a:latin typeface="Calibri"/>
+              </a:rPr>
+              <a:t>claude-opus-4-7-high</a:t>
+            </a:r>
+          </a:p>
+          <a:p>
+            <a:pPr>
+              <a:lnSpc>
+                <a:spcPts val="1080"/>
+              </a:lnSpc>
+              <a:spcBef>
+                <a:spcPts val="0"/>
+              </a:spcBef>
+              <a:spcAft>
+                <a:spcPts val="0"/>
+              </a:spcAft>
+            </a:pPr>
+            <a:r>
+              <a:rPr sz="900" b="0">
+                <a:solidFill>
+                  <a:srgbClr val="4472C4"/>
+                </a:solidFill>
+                <a:latin typeface="Calibri"/>
+              </a:rPr>
+              <a:t>■ </a:t>
+            </a:r>
+            <a:r>
+              <a:rPr sz="900" b="1">
+                <a:solidFill>
+                  <a:srgbClr val="000000"/>
+                </a:solidFill>
+                <a:latin typeface="Calibri"/>
+              </a:rPr>
+              <a:t>1551  </a:t>
+            </a:r>
+            <a:r>
+              <a:rPr sz="900" b="0">
+                <a:solidFill>
+                  <a:srgbClr val="000000"/>
+                </a:solidFill>
+                <a:latin typeface="Calibri"/>
+              </a:rPr>
+              <a:t>claude-opus-4-6-high</a:t>
+            </a:r>
+          </a:p>
+          <a:p>
+            <a:pPr>
+              <a:lnSpc>
+                <a:spcPts val="1080"/>
+              </a:lnSpc>
+              <a:spcBef>
+                <a:spcPts val="0"/>
+              </a:spcBef>
+              <a:spcAft>
+                <a:spcPts val="0"/>
+              </a:spcAft>
+            </a:pPr>
+            <a:r>
+              <a:rPr sz="900" b="0">
+                <a:solidFill>
+                  <a:srgbClr val="4472C4"/>
+                </a:solidFill>
+                <a:latin typeface="Calibri"/>
+              </a:rPr>
+              <a:t>■ </a:t>
+            </a:r>
+            <a:r>
+              <a:rPr sz="900" b="1">
+                <a:solidFill>
+                  <a:srgbClr val="000000"/>
+                </a:solidFill>
+                <a:latin typeface="Calibri"/>
+              </a:rPr>
+              <a:t>1547  </a:t>
+            </a:r>
+            <a:r>
+              <a:rPr sz="900" b="0">
+                <a:solidFill>
+                  <a:srgbClr val="000000"/>
+                </a:solidFill>
+                <a:latin typeface="Calibri"/>
+              </a:rPr>
+              <a:t>claude-opus-4-7</a:t>
+            </a:r>
+          </a:p>
+          <a:p>
+            <a:pPr>
+              <a:lnSpc>
+                <a:spcPts val="1080"/>
+              </a:lnSpc>
+              <a:spcBef>
+                <a:spcPts val="0"/>
+              </a:spcBef>
+              <a:spcAft>
+                <a:spcPts val="0"/>
+              </a:spcAft>
+            </a:pPr>
+            <a:r>
+              <a:rPr sz="900" b="0">
+                <a:solidFill>
+                  <a:srgbClr val="4472C4"/>
+                </a:solidFill>
+                <a:latin typeface="Calibri"/>
+              </a:rPr>
+              <a:t>■ </a:t>
+            </a:r>
+            <a:r>
+              <a:rPr sz="900" b="1">
+                <a:solidFill>
+                  <a:srgbClr val="000000"/>
+                </a:solidFill>
+                <a:latin typeface="Calibri"/>
+              </a:rPr>
+              <a:t>1546  </a:t>
+            </a:r>
+            <a:r>
+              <a:rPr sz="900" b="0">
+                <a:solidFill>
+                  <a:srgbClr val="000000"/>
+                </a:solidFill>
+                <a:latin typeface="Calibri"/>
+              </a:rPr>
+              <a:t>claude-opus-4-6</a:t>
+            </a:r>
+          </a:p>
+          <a:p>
+            <a:pPr>
+              <a:lnSpc>
+                <a:spcPts val="1080"/>
+              </a:lnSpc>
+              <a:spcBef>
+                <a:spcPts val="0"/>
+              </a:spcBef>
+              <a:spcAft>
+                <a:spcPts val="0"/>
+              </a:spcAft>
+            </a:pPr>
+            <a:r>
+              <a:rPr sz="900" b="0">
+                <a:solidFill>
+                  <a:srgbClr val="00B050"/>
+                </a:solidFill>
+                <a:latin typeface="Calibri"/>
+              </a:rPr>
+              <a:t>■ </a:t>
+            </a:r>
+            <a:r>
+              <a:rPr sz="900" b="1">
+                <a:solidFill>
+                  <a:srgbClr val="000000"/>
+                </a:solidFill>
+                <a:latin typeface="Calibri"/>
+              </a:rPr>
+              <a:t>1538  </a:t>
+            </a:r>
+            <a:r>
+              <a:rPr sz="900" b="0">
+                <a:solidFill>
+                  <a:srgbClr val="000000"/>
+                </a:solidFill>
+                <a:latin typeface="Calibri"/>
+              </a:rPr>
+              <a:t>kimi-k3-max</a:t>
+            </a:r>
+          </a:p>
+          <a:p>
+            <a:pPr>
+              <a:lnSpc>
+                <a:spcPts val="1080"/>
+              </a:lnSpc>
+              <a:spcBef>
+                <a:spcPts val="0"/>
+              </a:spcBef>
+              <a:spcAft>
+                <a:spcPts val="0"/>
+              </a:spcAft>
+            </a:pPr>
+            <a:r>
+              <a:rPr sz="900" b="0">
+                <a:solidFill>
+                  <a:srgbClr val="FFD700"/>
+                </a:solidFill>
+                <a:latin typeface="Calibri"/>
+              </a:rPr>
+              <a:t>■ </a:t>
+            </a:r>
+            <a:r>
+              <a:rPr sz="900" b="1">
+                <a:solidFill>
+                  <a:srgbClr val="000000"/>
+                </a:solidFill>
+                <a:latin typeface="Calibri"/>
+              </a:rPr>
+              <a:t>1537  </a:t>
+            </a:r>
+            <a:r>
+              <a:rPr sz="900" b="0">
+                <a:solidFill>
+                  <a:srgbClr val="000000"/>
+                </a:solidFill>
+                <a:latin typeface="Calibri"/>
+              </a:rPr>
+              <a:t>gpt-6-astra-max</a:t>
+            </a:r>
+          </a:p>
+          <a:p>
+            <a:pPr>
+              <a:lnSpc>
+                <a:spcPts val="1080"/>
+              </a:lnSpc>
+              <a:spcBef>
+                <a:spcPts val="0"/>
+              </a:spcBef>
+              <a:spcAft>
+                <a:spcPts val="0"/>
+              </a:spcAft>
+            </a:pPr>
+            <a:r>
+              <a:rPr sz="900" b="0">
+                <a:solidFill>
+                  <a:srgbClr val="FF0000"/>
+                </a:solidFill>
+                <a:latin typeface="Calibri"/>
+              </a:rPr>
+              <a:t>■ </a:t>
+            </a:r>
+            <a:r>
+              <a:rPr sz="900" b="1">
+                <a:solidFill>
+                  <a:srgbClr val="000000"/>
+                </a:solidFill>
+                <a:latin typeface="Calibri"/>
+              </a:rPr>
+              <a:t>1535  </a:t>
+            </a:r>
+            <a:r>
+              <a:rPr sz="900" b="0">
+                <a:solidFill>
+                  <a:srgbClr val="000000"/>
+                </a:solidFill>
+                <a:latin typeface="Calibri"/>
+              </a:rPr>
+              <a:t>gemini-3.8-flash-high</a:t>
+            </a:r>
+          </a:p>
+          <a:p>
+            <a:pPr>
+              <a:lnSpc>
+                <a:spcPts val="1080"/>
+              </a:lnSpc>
+              <a:spcBef>
+                <a:spcPts val="0"/>
+              </a:spcBef>
+              <a:spcAft>
+                <a:spcPts val="0"/>
+              </a:spcAft>
+            </a:pPr>
+            <a:r>
+              <a:rPr sz="900" b="0">
                 <a:solidFill>
                   <a:srgbClr val="A6A6A6"/>
                 </a:solidFill>
@@ -6122,7 +5465,647 @@
               <a:t>■ </a:t>
             </a:r>
             <a:r>
-              <a:rPr sz="1084" b="1">
+              <a:rPr sz="900" b="1">
+                <a:solidFill>
+                  <a:srgbClr val="000000"/>
+                </a:solidFill>
+                <a:latin typeface="Calibri"/>
+              </a:rPr>
+              <a:t>1535  </a:t>
+            </a:r>
+            <a:r>
+              <a:rPr sz="900" b="0">
+                <a:solidFill>
+                  <a:srgbClr val="000000"/>
+                </a:solidFill>
+                <a:latin typeface="Calibri"/>
+              </a:rPr>
+              <a:t>muse-spark-1.2 (xHigh)</a:t>
+            </a:r>
+          </a:p>
+          <a:p>
+            <a:pPr>
+              <a:lnSpc>
+                <a:spcPts val="1080"/>
+              </a:lnSpc>
+              <a:spcBef>
+                <a:spcPts val="0"/>
+              </a:spcBef>
+              <a:spcAft>
+                <a:spcPts val="0"/>
+              </a:spcAft>
+            </a:pPr>
+            <a:r>
+              <a:rPr sz="900" b="0">
+                <a:solidFill>
+                  <a:srgbClr val="4472C4"/>
+                </a:solidFill>
+                <a:latin typeface="Calibri"/>
+              </a:rPr>
+              <a:t>■ </a:t>
+            </a:r>
+            <a:r>
+              <a:rPr sz="900" b="1">
+                <a:solidFill>
+                  <a:srgbClr val="000000"/>
+                </a:solidFill>
+                <a:latin typeface="Calibri"/>
+              </a:rPr>
+              <a:t>1534  </a:t>
+            </a:r>
+            <a:r>
+              <a:rPr sz="900" b="0">
+                <a:solidFill>
+                  <a:srgbClr val="000000"/>
+                </a:solidFill>
+                <a:latin typeface="Calibri"/>
+              </a:rPr>
+              <a:t>claude-opus-4-8-high</a:t>
+            </a:r>
+          </a:p>
+          <a:p>
+            <a:pPr>
+              <a:lnSpc>
+                <a:spcPts val="1080"/>
+              </a:lnSpc>
+              <a:spcBef>
+                <a:spcPts val="0"/>
+              </a:spcBef>
+              <a:spcAft>
+                <a:spcPts val="0"/>
+              </a:spcAft>
+            </a:pPr>
+            <a:r>
+              <a:rPr sz="900" b="0">
+                <a:solidFill>
+                  <a:srgbClr val="4472C4"/>
+                </a:solidFill>
+                <a:latin typeface="Calibri"/>
+              </a:rPr>
+              <a:t>■ </a:t>
+            </a:r>
+            <a:r>
+              <a:rPr sz="900" b="1">
+                <a:solidFill>
+                  <a:srgbClr val="000000"/>
+                </a:solidFill>
+                <a:latin typeface="Calibri"/>
+              </a:rPr>
+              <a:t>1533  </a:t>
+            </a:r>
+            <a:r>
+              <a:rPr sz="900" b="0">
+                <a:solidFill>
+                  <a:srgbClr val="000000"/>
+                </a:solidFill>
+                <a:latin typeface="Calibri"/>
+              </a:rPr>
+              <a:t>claude-opus-5-high</a:t>
+            </a:r>
+          </a:p>
+          <a:p>
+            <a:pPr>
+              <a:lnSpc>
+                <a:spcPts val="1080"/>
+              </a:lnSpc>
+              <a:spcBef>
+                <a:spcPts val="0"/>
+              </a:spcBef>
+              <a:spcAft>
+                <a:spcPts val="0"/>
+              </a:spcAft>
+            </a:pPr>
+            <a:r>
+              <a:rPr sz="900" b="0">
+                <a:solidFill>
+                  <a:srgbClr val="A6A6A6"/>
+                </a:solidFill>
+                <a:latin typeface="Calibri"/>
+              </a:rPr>
+              <a:t>■ </a:t>
+            </a:r>
+            <a:r>
+              <a:rPr sz="900" b="1">
+                <a:solidFill>
+                  <a:srgbClr val="000000"/>
+                </a:solidFill>
+                <a:latin typeface="Calibri"/>
+              </a:rPr>
+              <a:t>1532  </a:t>
+            </a:r>
+            <a:r>
+              <a:rPr sz="900" b="0">
+                <a:solidFill>
+                  <a:srgbClr val="000000"/>
+                </a:solidFill>
+                <a:latin typeface="Calibri"/>
+              </a:rPr>
+              <a:t>muse-spark-1.1</a:t>
+            </a:r>
+          </a:p>
+          <a:p>
+            <a:pPr>
+              <a:lnSpc>
+                <a:spcPts val="1080"/>
+              </a:lnSpc>
+              <a:spcBef>
+                <a:spcPts val="0"/>
+              </a:spcBef>
+              <a:spcAft>
+                <a:spcPts val="0"/>
+              </a:spcAft>
+            </a:pPr>
+            <a:r>
+              <a:rPr sz="900" b="0">
+                <a:solidFill>
+                  <a:srgbClr val="4472C4"/>
+                </a:solidFill>
+                <a:latin typeface="Calibri"/>
+              </a:rPr>
+              <a:t>■ </a:t>
+            </a:r>
+            <a:r>
+              <a:rPr sz="900" b="1">
+                <a:solidFill>
+                  <a:srgbClr val="000000"/>
+                </a:solidFill>
+                <a:latin typeface="Calibri"/>
+              </a:rPr>
+              <a:t>1530  </a:t>
+            </a:r>
+            <a:r>
+              <a:rPr sz="900" b="0">
+                <a:solidFill>
+                  <a:srgbClr val="000000"/>
+                </a:solidFill>
+                <a:latin typeface="Calibri"/>
+              </a:rPr>
+              <a:t>claude-opus-4-5-20251101-high-32k</a:t>
+            </a:r>
+          </a:p>
+          <a:p>
+            <a:pPr>
+              <a:lnSpc>
+                <a:spcPts val="1080"/>
+              </a:lnSpc>
+              <a:spcBef>
+                <a:spcPts val="0"/>
+              </a:spcBef>
+              <a:spcAft>
+                <a:spcPts val="0"/>
+              </a:spcAft>
+            </a:pPr>
+            <a:r>
+              <a:rPr sz="900" b="0">
+                <a:solidFill>
+                  <a:srgbClr val="4472C4"/>
+                </a:solidFill>
+                <a:latin typeface="Calibri"/>
+              </a:rPr>
+              <a:t>■ </a:t>
+            </a:r>
+            <a:r>
+              <a:rPr sz="900" b="1">
+                <a:solidFill>
+                  <a:srgbClr val="000000"/>
+                </a:solidFill>
+                <a:latin typeface="Calibri"/>
+              </a:rPr>
+              <a:t>1529  </a:t>
+            </a:r>
+            <a:r>
+              <a:rPr sz="900" b="0">
+                <a:solidFill>
+                  <a:srgbClr val="000000"/>
+                </a:solidFill>
+                <a:latin typeface="Calibri"/>
+              </a:rPr>
+              <a:t>claude-opus-4-8</a:t>
+            </a:r>
+          </a:p>
+          <a:p>
+            <a:pPr>
+              <a:lnSpc>
+                <a:spcPts val="1080"/>
+              </a:lnSpc>
+              <a:spcBef>
+                <a:spcPts val="0"/>
+              </a:spcBef>
+              <a:spcAft>
+                <a:spcPts val="0"/>
+              </a:spcAft>
+            </a:pPr>
+            <a:r>
+              <a:rPr sz="900" b="0">
+                <a:solidFill>
+                  <a:srgbClr val="4472C4"/>
+                </a:solidFill>
+                <a:latin typeface="Calibri"/>
+              </a:rPr>
+              <a:t>■ </a:t>
+            </a:r>
+            <a:r>
+              <a:rPr sz="900" b="1">
+                <a:solidFill>
+                  <a:srgbClr val="000000"/>
+                </a:solidFill>
+                <a:latin typeface="Calibri"/>
+              </a:rPr>
+              <a:t>1528  </a:t>
+            </a:r>
+            <a:r>
+              <a:rPr sz="900" b="0">
+                <a:solidFill>
+                  <a:srgbClr val="000000"/>
+                </a:solidFill>
+                <a:latin typeface="Calibri"/>
+              </a:rPr>
+              <a:t>claude-sonnet-4-6</a:t>
+            </a:r>
+          </a:p>
+          <a:p>
+            <a:pPr>
+              <a:lnSpc>
+                <a:spcPts val="1080"/>
+              </a:lnSpc>
+              <a:spcBef>
+                <a:spcPts val="0"/>
+              </a:spcBef>
+              <a:spcAft>
+                <a:spcPts val="0"/>
+              </a:spcAft>
+            </a:pPr>
+            <a:r>
+              <a:rPr sz="900" b="0">
+                <a:solidFill>
+                  <a:srgbClr val="FFD700"/>
+                </a:solidFill>
+                <a:latin typeface="Calibri"/>
+              </a:rPr>
+              <a:t>■ </a:t>
+            </a:r>
+            <a:r>
+              <a:rPr sz="900" b="1">
+                <a:solidFill>
+                  <a:srgbClr val="000000"/>
+                </a:solidFill>
+                <a:latin typeface="Calibri"/>
+              </a:rPr>
+              <a:t>1527  </a:t>
+            </a:r>
+            <a:r>
+              <a:rPr sz="900" b="0">
+                <a:solidFill>
+                  <a:srgbClr val="000000"/>
+                </a:solidFill>
+                <a:latin typeface="Calibri"/>
+              </a:rPr>
+              <a:t>gpt-5.6-sol-xhigh</a:t>
+            </a:r>
+          </a:p>
+          <a:p>
+            <a:pPr>
+              <a:lnSpc>
+                <a:spcPts val="1080"/>
+              </a:lnSpc>
+              <a:spcBef>
+                <a:spcPts val="0"/>
+              </a:spcBef>
+              <a:spcAft>
+                <a:spcPts val="0"/>
+              </a:spcAft>
+            </a:pPr>
+            <a:r>
+              <a:rPr sz="900" b="0">
+                <a:solidFill>
+                  <a:srgbClr val="4472C4"/>
+                </a:solidFill>
+                <a:latin typeface="Calibri"/>
+              </a:rPr>
+              <a:t>■ </a:t>
+            </a:r>
+            <a:r>
+              <a:rPr sz="900" b="1">
+                <a:solidFill>
+                  <a:srgbClr val="000000"/>
+                </a:solidFill>
+                <a:latin typeface="Calibri"/>
+              </a:rPr>
+              <a:t>1526  </a:t>
+            </a:r>
+            <a:r>
+              <a:rPr sz="900" b="0">
+                <a:solidFill>
+                  <a:srgbClr val="000000"/>
+                </a:solidFill>
+                <a:latin typeface="Calibri"/>
+              </a:rPr>
+              <a:t>claude-opus-5-max</a:t>
+            </a:r>
+          </a:p>
+          <a:p>
+            <a:pPr>
+              <a:lnSpc>
+                <a:spcPts val="1080"/>
+              </a:lnSpc>
+              <a:spcBef>
+                <a:spcPts val="0"/>
+              </a:spcBef>
+              <a:spcAft>
+                <a:spcPts val="0"/>
+              </a:spcAft>
+            </a:pPr>
+            <a:r>
+              <a:rPr sz="900" b="0">
+                <a:solidFill>
+                  <a:srgbClr val="A6A6A6"/>
+                </a:solidFill>
+                <a:latin typeface="Calibri"/>
+              </a:rPr>
+              <a:t>■ </a:t>
+            </a:r>
+            <a:r>
+              <a:rPr sz="900" b="1">
+                <a:solidFill>
+                  <a:srgbClr val="000000"/>
+                </a:solidFill>
+                <a:latin typeface="Calibri"/>
+              </a:rPr>
+              <a:t>1526  </a:t>
+            </a:r>
+            <a:r>
+              <a:rPr sz="900" b="0">
+                <a:solidFill>
+                  <a:srgbClr val="000000"/>
+                </a:solidFill>
+                <a:latin typeface="Calibri"/>
+              </a:rPr>
+              <a:t>muse-spark</a:t>
+            </a:r>
+          </a:p>
+          <a:p>
+            <a:pPr>
+              <a:lnSpc>
+                <a:spcPts val="1080"/>
+              </a:lnSpc>
+              <a:spcBef>
+                <a:spcPts val="0"/>
+              </a:spcBef>
+              <a:spcAft>
+                <a:spcPts val="0"/>
+              </a:spcAft>
+            </a:pPr>
+            <a:r>
+              <a:rPr sz="900" b="0">
+                <a:solidFill>
+                  <a:srgbClr val="00B050"/>
+                </a:solidFill>
+                <a:latin typeface="Calibri"/>
+              </a:rPr>
+              <a:t>■ </a:t>
+            </a:r>
+            <a:r>
+              <a:rPr sz="900" b="1">
+                <a:solidFill>
+                  <a:srgbClr val="000000"/>
+                </a:solidFill>
+                <a:latin typeface="Calibri"/>
+              </a:rPr>
+              <a:t>1526  </a:t>
+            </a:r>
+            <a:r>
+              <a:rPr sz="900" b="0">
+                <a:solidFill>
+                  <a:srgbClr val="000000"/>
+                </a:solidFill>
+                <a:latin typeface="Calibri"/>
+              </a:rPr>
+              <a:t>glm-5.3-max</a:t>
+            </a:r>
+          </a:p>
+          <a:p>
+            <a:pPr>
+              <a:lnSpc>
+                <a:spcPts val="1080"/>
+              </a:lnSpc>
+              <a:spcBef>
+                <a:spcPts val="0"/>
+              </a:spcBef>
+              <a:spcAft>
+                <a:spcPts val="0"/>
+              </a:spcAft>
+            </a:pPr>
+            <a:r>
+              <a:rPr sz="900" b="0">
+                <a:solidFill>
+                  <a:srgbClr val="00B050"/>
+                </a:solidFill>
+                <a:latin typeface="Calibri"/>
+              </a:rPr>
+              <a:t>■ </a:t>
+            </a:r>
+            <a:r>
+              <a:rPr sz="900" b="1">
+                <a:solidFill>
+                  <a:srgbClr val="000000"/>
+                </a:solidFill>
+                <a:latin typeface="Calibri"/>
+              </a:rPr>
+              <a:t>1525  </a:t>
+            </a:r>
+            <a:r>
+              <a:rPr sz="900" b="0">
+                <a:solidFill>
+                  <a:srgbClr val="000000"/>
+                </a:solidFill>
+                <a:latin typeface="Calibri"/>
+              </a:rPr>
+              <a:t>qwen3.7-max-preview</a:t>
+            </a:r>
+          </a:p>
+          <a:p>
+            <a:pPr>
+              <a:lnSpc>
+                <a:spcPts val="1080"/>
+              </a:lnSpc>
+              <a:spcBef>
+                <a:spcPts val="0"/>
+              </a:spcBef>
+              <a:spcAft>
+                <a:spcPts val="0"/>
+              </a:spcAft>
+            </a:pPr>
+            <a:r>
+              <a:rPr sz="900" b="0">
+                <a:solidFill>
+                  <a:srgbClr val="00B050"/>
+                </a:solidFill>
+                <a:latin typeface="Calibri"/>
+              </a:rPr>
+              <a:t>■ </a:t>
+            </a:r>
+            <a:r>
+              <a:rPr sz="900" b="1">
+                <a:solidFill>
+                  <a:srgbClr val="000000"/>
+                </a:solidFill>
+                <a:latin typeface="Calibri"/>
+              </a:rPr>
+              <a:t>1524  </a:t>
+            </a:r>
+            <a:r>
+              <a:rPr sz="900" b="0">
+                <a:solidFill>
+                  <a:srgbClr val="000000"/>
+                </a:solidFill>
+                <a:latin typeface="Calibri"/>
+              </a:rPr>
+              <a:t>glm-5.3-flash</a:t>
+            </a:r>
+          </a:p>
+          <a:p>
+            <a:pPr>
+              <a:lnSpc>
+                <a:spcPts val="1080"/>
+              </a:lnSpc>
+              <a:spcBef>
+                <a:spcPts val="0"/>
+              </a:spcBef>
+              <a:spcAft>
+                <a:spcPts val="0"/>
+              </a:spcAft>
+            </a:pPr>
+            <a:r>
+              <a:rPr sz="900" b="0">
+                <a:solidFill>
+                  <a:srgbClr val="4472C4"/>
+                </a:solidFill>
+                <a:latin typeface="Calibri"/>
+              </a:rPr>
+              <a:t>■ </a:t>
+            </a:r>
+            <a:r>
+              <a:rPr sz="900" b="1">
+                <a:solidFill>
+                  <a:srgbClr val="000000"/>
+                </a:solidFill>
+                <a:latin typeface="Calibri"/>
+              </a:rPr>
+              <a:t>1523  </a:t>
+            </a:r>
+            <a:r>
+              <a:rPr sz="900" b="0">
+                <a:solidFill>
+                  <a:srgbClr val="000000"/>
+                </a:solidFill>
+                <a:latin typeface="Calibri"/>
+              </a:rPr>
+              <a:t>claude-opus-4-5-20251101</a:t>
+            </a:r>
+          </a:p>
+          <a:p>
+            <a:pPr>
+              <a:lnSpc>
+                <a:spcPts val="1080"/>
+              </a:lnSpc>
+              <a:spcBef>
+                <a:spcPts val="0"/>
+              </a:spcBef>
+              <a:spcAft>
+                <a:spcPts val="0"/>
+              </a:spcAft>
+            </a:pPr>
+            <a:r>
+              <a:rPr sz="900" b="0">
+                <a:solidFill>
+                  <a:srgbClr val="00B050"/>
+                </a:solidFill>
+                <a:latin typeface="Calibri"/>
+              </a:rPr>
+              <a:t>■ </a:t>
+            </a:r>
+            <a:r>
+              <a:rPr sz="900" b="1">
+                <a:solidFill>
+                  <a:srgbClr val="000000"/>
+                </a:solidFill>
+                <a:latin typeface="Calibri"/>
+              </a:rPr>
+              <a:t>1522  </a:t>
+            </a:r>
+            <a:r>
+              <a:rPr sz="900" b="0">
+                <a:solidFill>
+                  <a:srgbClr val="000000"/>
+                </a:solidFill>
+                <a:latin typeface="Calibri"/>
+              </a:rPr>
+              <a:t>qwen3.8-max</a:t>
+            </a:r>
+          </a:p>
+          <a:p>
+            <a:pPr>
+              <a:lnSpc>
+                <a:spcPts val="1080"/>
+              </a:lnSpc>
+              <a:spcBef>
+                <a:spcPts val="0"/>
+              </a:spcBef>
+              <a:spcAft>
+                <a:spcPts val="0"/>
+              </a:spcAft>
+            </a:pPr>
+            <a:r>
+              <a:rPr sz="900" b="0">
+                <a:solidFill>
+                  <a:srgbClr val="FF0000"/>
+                </a:solidFill>
+                <a:latin typeface="Calibri"/>
+              </a:rPr>
+              <a:t>■ </a:t>
+            </a:r>
+            <a:r>
+              <a:rPr sz="900" b="1">
+                <a:solidFill>
+                  <a:srgbClr val="000000"/>
+                </a:solidFill>
+                <a:latin typeface="Calibri"/>
+              </a:rPr>
+              <a:t>1522  </a:t>
+            </a:r>
+            <a:r>
+              <a:rPr sz="900" b="0">
+                <a:solidFill>
+                  <a:srgbClr val="000000"/>
+                </a:solidFill>
+                <a:latin typeface="Calibri"/>
+              </a:rPr>
+              <a:t>gemini-3.7-flash-high</a:t>
+            </a:r>
+          </a:p>
+          <a:p>
+            <a:pPr>
+              <a:lnSpc>
+                <a:spcPts val="1080"/>
+              </a:lnSpc>
+              <a:spcBef>
+                <a:spcPts val="0"/>
+              </a:spcBef>
+              <a:spcAft>
+                <a:spcPts val="0"/>
+              </a:spcAft>
+            </a:pPr>
+            <a:r>
+              <a:rPr sz="900" b="0">
+                <a:solidFill>
+                  <a:srgbClr val="A6A6A6"/>
+                </a:solidFill>
+                <a:latin typeface="Calibri"/>
+              </a:rPr>
+              <a:t>■ </a:t>
+            </a:r>
+            <a:r>
+              <a:rPr sz="900" b="1">
                 <a:solidFill>
                   <a:srgbClr val="000000"/>
                 </a:solidFill>
@@ -6131,7 +6114,7 @@
               <a:t>1521  </a:t>
             </a:r>
             <a:r>
-              <a:rPr sz="1084" b="0">
+              <a:rPr sz="900" b="0">
                 <a:solidFill>
                   <a:srgbClr val="000000"/>
                 </a:solidFill>
@@ -6169,7 +6152,7 @@
         <p:spPr>
           <a:xfrm>
             <a:off x="82296" y="0"/>
-            <a:ext cx="8979408" cy="329184"/>
+            <a:ext cx="4442847" cy="329184"/>
           </a:xfrm>
           <a:prstGeom prst="rect">
             <a:avLst/>
@@ -6177,7 +6160,7 @@
           <a:noFill/>
         </p:spPr>
         <p:txBody>
-          <a:bodyPr wrap="square" lIns="45720" rIns="45720" tIns="18288" bIns="18288">
+          <a:bodyPr wrap="none" lIns="45720" rIns="45720" tIns="18288" bIns="18288">
             <a:spAutoFit/>
           </a:bodyPr>
           <a:lstStyle/>
@@ -6202,8 +6185,8 @@
         </p:nvSpPr>
         <p:spPr>
           <a:xfrm>
-            <a:off x="82296" y="420624"/>
-            <a:ext cx="5577840" cy="1021587"/>
+            <a:off x="82296" y="786384"/>
+            <a:ext cx="5577840" cy="770128"/>
           </a:xfrm>
           <a:prstGeom prst="rect">
             <a:avLst/>
@@ -6224,9 +6207,9 @@
           <a:lstStyle/>
           <a:p>
             <a:r>
-              <a:rPr sz="1700" b="1">
-                <a:solidFill>
-                  <a:srgbClr val="000000"/>
+              <a:rPr sz="1300" b="1">
+                <a:solidFill>
+                  <a:srgbClr val="FF0000"/>
                 </a:solidFill>
                 <a:latin typeface="Calibri"/>
               </a:rPr>
@@ -6238,12 +6221,12 @@
               <a:buClr>
                 <a:srgbClr val="FF0000"/>
               </a:buClr>
-              <a:buSzPts val="1600"/>
+              <a:buSzPts val="1200"/>
               <a:buFont typeface="Calibri"/>
               <a:buChar char="●"/>
             </a:pPr>
             <a:r>
-              <a:rPr sz="1600" b="0">
+              <a:rPr sz="1200" b="0">
                 <a:solidFill>
                   <a:srgbClr val="000000"/>
                 </a:solidFill>
@@ -6257,12 +6240,12 @@
               <a:buClr>
                 <a:srgbClr val="FF0000"/>
               </a:buClr>
-              <a:buSzPts val="1600"/>
+              <a:buSzPts val="1200"/>
               <a:buFont typeface="Calibri"/>
               <a:buChar char="●"/>
             </a:pPr>
             <a:r>
-              <a:rPr sz="1600" b="0">
+              <a:rPr sz="1200" b="0">
                 <a:solidFill>
                   <a:srgbClr val="000000"/>
                 </a:solidFill>
@@ -6271,7 +6254,7 @@
               <a:t>Useful for comparing </a:t>
             </a:r>
             <a:r>
-              <a:rPr sz="1600" b="1">
+              <a:rPr sz="1200" b="1">
                 <a:solidFill>
                   <a:srgbClr val="000000"/>
                 </a:solidFill>
@@ -6282,7 +6265,7 @@
           </a:p>
           <a:p>
             <a:r>
-              <a:rPr sz="1200" b="0">
+              <a:rPr sz="900" b="0">
                 <a:solidFill>
                   <a:srgbClr val="0563C1"/>
                 </a:solidFill>
@@ -6350,7 +6333,7 @@
         <p:spPr>
           <a:xfrm>
             <a:off x="82296" y="0"/>
-            <a:ext cx="8979408" cy="329184"/>
+            <a:ext cx="1085774" cy="329184"/>
           </a:xfrm>
           <a:prstGeom prst="rect">
             <a:avLst/>
@@ -6358,7 +6341,7 @@
           <a:noFill/>
         </p:spPr>
         <p:txBody>
-          <a:bodyPr wrap="square" lIns="45720" rIns="45720" tIns="18288" bIns="18288">
+          <a:bodyPr wrap="none" lIns="45720" rIns="45720" tIns="18288" bIns="18288">
             <a:spAutoFit/>
           </a:bodyPr>
           <a:lstStyle/>
@@ -6383,7 +6366,7 @@
         </p:nvSpPr>
         <p:spPr>
           <a:xfrm>
-            <a:off x="82296" y="420624"/>
+            <a:off x="82296" y="617897"/>
             <a:ext cx="5577840" cy="2329180"/>
           </a:xfrm>
           <a:prstGeom prst="rect">
@@ -6407,7 +6390,7 @@
             <a:r>
               <a:rPr sz="1300" b="1">
                 <a:solidFill>
-                  <a:srgbClr val="000000"/>
+                  <a:srgbClr val="FF0000"/>
                 </a:solidFill>
                 <a:latin typeface="Calibri"/>
               </a:rPr>
@@ -6536,7 +6519,7 @@
         </p:blipFill>
         <p:spPr>
           <a:xfrm>
-            <a:off x="5769864" y="699896"/>
+            <a:off x="5769864" y="776647"/>
             <a:ext cx="3291840" cy="2011680"/>
           </a:xfrm>
           <a:prstGeom prst="rect">
@@ -6557,7 +6540,7 @@
         </p:nvSpPr>
         <p:spPr>
           <a:xfrm>
-            <a:off x="82296" y="3100578"/>
+            <a:off x="82296" y="3144350"/>
             <a:ext cx="5577840" cy="1715008"/>
           </a:xfrm>
           <a:prstGeom prst="rect">
@@ -6581,7 +6564,7 @@
             <a:r>
               <a:rPr sz="1300" b="1">
                 <a:solidFill>
-                  <a:srgbClr val="000000"/>
+                  <a:srgbClr val="FF0000"/>
                 </a:solidFill>
                 <a:latin typeface="Calibri"/>
               </a:rPr>
@@ -6715,8 +6698,8 @@
         </p:blipFill>
         <p:spPr>
           <a:xfrm>
-            <a:off x="6124501" y="3100578"/>
-            <a:ext cx="2582565" cy="1956054"/>
+            <a:off x="6283627" y="3144350"/>
+            <a:ext cx="2264313" cy="1715008"/>
           </a:xfrm>
           <a:prstGeom prst="rect">
             <a:avLst/>
@@ -6755,7 +6738,7 @@
         <p:spPr>
           <a:xfrm>
             <a:off x="82296" y="0"/>
-            <a:ext cx="8979408" cy="329184"/>
+            <a:ext cx="1085774" cy="329184"/>
           </a:xfrm>
           <a:prstGeom prst="rect">
             <a:avLst/>
@@ -6763,7 +6746,7 @@
           <a:noFill/>
         </p:spPr>
         <p:txBody>
-          <a:bodyPr wrap="square" lIns="45720" rIns="45720" tIns="18288" bIns="18288">
+          <a:bodyPr wrap="none" lIns="45720" rIns="45720" tIns="18288" bIns="18288">
             <a:spAutoFit/>
           </a:bodyPr>
           <a:lstStyle/>
@@ -6788,7 +6771,7 @@
         </p:nvSpPr>
         <p:spPr>
           <a:xfrm>
-            <a:off x="82296" y="420624"/>
+            <a:off x="82296" y="665141"/>
             <a:ext cx="5577840" cy="2329180"/>
           </a:xfrm>
           <a:prstGeom prst="rect">
@@ -6812,7 +6795,7 @@
             <a:r>
               <a:rPr sz="1300" b="1">
                 <a:solidFill>
-                  <a:srgbClr val="000000"/>
+                  <a:srgbClr val="FF0000"/>
                 </a:solidFill>
                 <a:latin typeface="Calibri"/>
               </a:rPr>
@@ -6931,8 +6914,8 @@
         </p:blipFill>
         <p:spPr>
           <a:xfrm>
-            <a:off x="5769864" y="467105"/>
-            <a:ext cx="3291840" cy="2548128"/>
+            <a:off x="5911289" y="665141"/>
+            <a:ext cx="3008988" cy="2329180"/>
           </a:xfrm>
           <a:prstGeom prst="rect">
             <a:avLst/>
@@ -6952,7 +6935,7 @@
         </p:nvSpPr>
         <p:spPr>
           <a:xfrm>
-            <a:off x="82296" y="3171444"/>
+            <a:off x="82296" y="3238838"/>
             <a:ext cx="5577840" cy="1573276"/>
           </a:xfrm>
           <a:prstGeom prst="rect">
@@ -6976,7 +6959,7 @@
             <a:r>
               <a:rPr sz="1300" b="1">
                 <a:solidFill>
-                  <a:srgbClr val="000000"/>
+                  <a:srgbClr val="FF0000"/>
                 </a:solidFill>
                 <a:latin typeface="Calibri"/>
               </a:rPr>
@@ -7108,8 +7091,8 @@
         </p:blipFill>
         <p:spPr>
           <a:xfrm>
-            <a:off x="5909864" y="3171444"/>
-            <a:ext cx="3011838" cy="1885187"/>
+            <a:off x="6159025" y="3238838"/>
+            <a:ext cx="2513517" cy="1573276"/>
           </a:xfrm>
           <a:prstGeom prst="rect">
             <a:avLst/>
@@ -7148,7 +7131,7 @@
         <p:spPr>
           <a:xfrm>
             <a:off x="82296" y="0"/>
-            <a:ext cx="8979408" cy="329184"/>
+            <a:ext cx="3425668" cy="329184"/>
           </a:xfrm>
           <a:prstGeom prst="rect">
             <a:avLst/>
@@ -7156,7 +7139,7 @@
           <a:noFill/>
         </p:spPr>
         <p:txBody>
-          <a:bodyPr wrap="square" lIns="45720" rIns="45720" tIns="18288" bIns="18288">
+          <a:bodyPr wrap="none" lIns="45720" rIns="45720" tIns="18288" bIns="18288">
             <a:spAutoFit/>
           </a:bodyPr>
           <a:lstStyle/>
@@ -7181,8 +7164,8 @@
         </p:nvSpPr>
         <p:spPr>
           <a:xfrm>
-            <a:off x="82296" y="420624"/>
-            <a:ext cx="5577840" cy="1777492"/>
+            <a:off x="82296" y="786384"/>
+            <a:ext cx="4206240" cy="3138932"/>
           </a:xfrm>
           <a:prstGeom prst="rect">
             <a:avLst/>
@@ -7203,26 +7186,18 @@
           <a:lstStyle/>
           <a:p>
             <a:r>
-              <a:rPr sz="1700" b="1">
-                <a:solidFill>
-                  <a:srgbClr val="000000"/>
-                </a:solidFill>
-                <a:latin typeface="Calibri"/>
-              </a:rPr>
-              <a:t>Subscribe to the channel</a:t>
-            </a:r>
-          </a:p>
-          <a:p>
-            <a:pPr marL="171450" indent="-133350">
-              <a:buClr>
-                <a:srgbClr val="FF0000"/>
-              </a:buClr>
-              <a:buSzPts val="1600"/>
-              <a:buFont typeface="Calibri"/>
-              <a:buChar char="●"/>
-            </a:pPr>
-            <a:r>
-              <a:rPr sz="1600" b="0">
+              <a:rPr sz="2200" b="0">
+                <a:solidFill>
+                  <a:srgbClr val="000000"/>
+                </a:solidFill>
+                <a:latin typeface="Calibri"/>
+              </a:rPr>
+              <a:t>Weekly videos every Friday</a:t>
+            </a:r>
+          </a:p>
+          <a:p>
+            <a:r>
+              <a:rPr sz="2200" b="0">
                 <a:solidFill>
                   <a:srgbClr val="000000"/>
                 </a:solidFill>
@@ -7232,16 +7207,8 @@
             </a:r>
           </a:p>
           <a:p>
-            <a:pPr marL="171450" indent="-133350">
-              <a:buClr>
-                <a:srgbClr val="FF0000"/>
-              </a:buClr>
-              <a:buSzPts val="1600"/>
-              <a:buFont typeface="Calibri"/>
-              <a:buChar char="●"/>
-            </a:pPr>
-            <a:r>
-              <a:rPr sz="1600" b="0">
+            <a:r>
+              <a:rPr sz="2200" b="0">
                 <a:solidFill>
                   <a:srgbClr val="000000"/>
                 </a:solidFill>
@@ -7252,7 +7219,7 @@
           </a:p>
           <a:p>
             <a:r>
-              <a:rPr sz="1200" b="0">
+              <a:rPr sz="1800" b="0">
                 <a:solidFill>
                   <a:srgbClr val="0563C1"/>
                 </a:solidFill>
@@ -7263,41 +7230,25 @@
             </a:r>
           </a:p>
           <a:p>
-            <a:pPr marL="171450" indent="-133350">
-              <a:buClr>
-                <a:srgbClr val="FF0000"/>
-              </a:buClr>
-              <a:buSzPts val="1600"/>
-              <a:buFont typeface="Calibri"/>
-              <a:buChar char="●"/>
-            </a:pPr>
-            <a:r>
-              <a:rPr sz="1600" b="0">
-                <a:solidFill>
-                  <a:srgbClr val="000000"/>
-                </a:solidFill>
-                <a:latin typeface="Calibri"/>
-              </a:rPr>
-              <a:t>2. Download slides from GitHub using the links under the videos</a:t>
-            </a:r>
-          </a:p>
-          <a:p>
-            <a:pPr marL="171450" indent="-133350">
-              <a:buClr>
-                <a:srgbClr val="FF0000"/>
-              </a:buClr>
-              <a:buSzPts val="1600"/>
-              <a:buFont typeface="Calibri"/>
-              <a:buChar char="●"/>
-            </a:pPr>
-            <a:r>
-              <a:rPr sz="1600" b="0">
-                <a:solidFill>
-                  <a:srgbClr val="000000"/>
-                </a:solidFill>
-                <a:latin typeface="Calibri"/>
-              </a:rPr>
-              <a:t>3. Please pause the video and answer the pinned question in the comments</a:t>
+            <a:r>
+              <a:rPr sz="2200" b="0">
+                <a:solidFill>
+                  <a:srgbClr val="000000"/>
+                </a:solidFill>
+                <a:latin typeface="Calibri"/>
+              </a:rPr>
+              <a:t>2. Download slides from GitHub using links under the videos</a:t>
+            </a:r>
+          </a:p>
+          <a:p>
+            <a:r>
+              <a:rPr sz="2200" b="1">
+                <a:solidFill>
+                  <a:srgbClr val="FF0000"/>
+                </a:solidFill>
+                <a:latin typeface="Calibri"/>
+              </a:rPr>
+              <a:t>3. Please pause the video - and answer the pinned question in comments under the video</a:t>
             </a:r>
           </a:p>
         </p:txBody>
@@ -7318,8 +7269,8 @@
         </p:blipFill>
         <p:spPr>
           <a:xfrm>
-            <a:off x="5769864" y="1717548"/>
-            <a:ext cx="3291840" cy="2042160"/>
+            <a:off x="4398264" y="1293876"/>
+            <a:ext cx="4663440" cy="2889504"/>
           </a:xfrm>
           <a:prstGeom prst="rect">
             <a:avLst/>
@@ -7358,7 +7309,7 @@
         <p:spPr>
           <a:xfrm>
             <a:off x="82296" y="0"/>
-            <a:ext cx="8979408" cy="329184"/>
+            <a:ext cx="1085774" cy="329184"/>
           </a:xfrm>
           <a:prstGeom prst="rect">
             <a:avLst/>
@@ -7366,7 +7317,7 @@
           <a:noFill/>
         </p:spPr>
         <p:txBody>
-          <a:bodyPr wrap="square" lIns="45720" rIns="45720" tIns="18288" bIns="18288">
+          <a:bodyPr wrap="none" lIns="45720" rIns="45720" tIns="18288" bIns="18288">
             <a:spAutoFit/>
           </a:bodyPr>
           <a:lstStyle/>
@@ -7391,8 +7342,8 @@
         </p:nvSpPr>
         <p:spPr>
           <a:xfrm>
-            <a:off x="82296" y="420624"/>
-            <a:ext cx="5577840" cy="1848611"/>
+            <a:off x="82296" y="786384"/>
+            <a:ext cx="5577840" cy="1006348"/>
           </a:xfrm>
           <a:prstGeom prst="rect">
             <a:avLst/>
@@ -7413,9 +7364,9 @@
           <a:lstStyle/>
           <a:p>
             <a:r>
-              <a:rPr sz="1500" b="1">
-                <a:solidFill>
-                  <a:srgbClr val="000000"/>
+              <a:rPr sz="1300" b="1">
+                <a:solidFill>
+                  <a:srgbClr val="FF0000"/>
                 </a:solidFill>
                 <a:latin typeface="Calibri"/>
               </a:rPr>
@@ -7427,12 +7378,12 @@
               <a:buClr>
                 <a:srgbClr val="FF0000"/>
               </a:buClr>
-              <a:buSzPts val="1400"/>
+              <a:buSzPts val="1200"/>
               <a:buFont typeface="Calibri"/>
               <a:buChar char="●"/>
             </a:pPr>
             <a:r>
-              <a:rPr sz="1400" b="0">
+              <a:rPr sz="1200" b="0">
                 <a:solidFill>
                   <a:srgbClr val="000000"/>
                 </a:solidFill>
@@ -7446,12 +7397,12 @@
               <a:buClr>
                 <a:srgbClr val="FF0000"/>
               </a:buClr>
-              <a:buSzPts val="1400"/>
+              <a:buSzPts val="1200"/>
               <a:buFont typeface="Calibri"/>
               <a:buChar char="●"/>
             </a:pPr>
             <a:r>
-              <a:rPr sz="1400" b="0">
+              <a:rPr sz="1200" b="0">
                 <a:solidFill>
                   <a:srgbClr val="000000"/>
                 </a:solidFill>
@@ -7460,7 +7411,7 @@
               <a:t>Google reports up to </a:t>
             </a:r>
             <a:r>
-              <a:rPr sz="1400" b="0">
+              <a:rPr sz="1200" b="0">
                 <a:solidFill>
                   <a:srgbClr val="000000"/>
                 </a:solidFill>
@@ -7472,7 +7423,7 @@
               <a:t>88% fewer tokens</a:t>
             </a:r>
             <a:r>
-              <a:rPr sz="1400" b="0">
+              <a:rPr sz="1200" b="0">
                 <a:solidFill>
                   <a:srgbClr val="000000"/>
                 </a:solidFill>
@@ -7486,12 +7437,12 @@
               <a:buClr>
                 <a:srgbClr val="FF0000"/>
               </a:buClr>
-              <a:buSzPts val="1400"/>
+              <a:buSzPts val="1200"/>
               <a:buFont typeface="Calibri"/>
               <a:buChar char="●"/>
             </a:pPr>
             <a:r>
-              <a:rPr sz="1400" b="0">
+              <a:rPr sz="1200" b="0">
                 <a:solidFill>
                   <a:srgbClr val="000000"/>
                 </a:solidFill>
@@ -7505,12 +7456,12 @@
               <a:buClr>
                 <a:srgbClr val="FF0000"/>
               </a:buClr>
-              <a:buSzPts val="1400"/>
+              <a:buSzPts val="1200"/>
               <a:buFont typeface="Calibri"/>
               <a:buChar char="●"/>
             </a:pPr>
             <a:r>
-              <a:rPr sz="1400" b="0">
+              <a:rPr sz="1200" b="0">
                 <a:solidFill>
                   <a:srgbClr val="000000"/>
                 </a:solidFill>
@@ -7537,8 +7488,8 @@
         </p:blipFill>
         <p:spPr>
           <a:xfrm>
-            <a:off x="6075235" y="420624"/>
-            <a:ext cx="2681096" cy="2050542"/>
+            <a:off x="6444372" y="786384"/>
+            <a:ext cx="1942823" cy="1485900"/>
           </a:xfrm>
           <a:prstGeom prst="rect">
             <a:avLst/>
@@ -7558,8 +7509,8 @@
         </p:nvSpPr>
         <p:spPr>
           <a:xfrm>
-            <a:off x="82296" y="2580894"/>
-            <a:ext cx="5577840" cy="2273807"/>
+            <a:off x="82296" y="2638044"/>
+            <a:ext cx="5577840" cy="1573276"/>
           </a:xfrm>
           <a:prstGeom prst="rect">
             <a:avLst/>
@@ -7580,9 +7531,9 @@
           <a:lstStyle/>
           <a:p>
             <a:r>
-              <a:rPr sz="1500" b="1">
-                <a:solidFill>
-                  <a:srgbClr val="000000"/>
+              <a:rPr sz="1300" b="1">
+                <a:solidFill>
+                  <a:srgbClr val="FF0000"/>
                 </a:solidFill>
                 <a:latin typeface="Calibri"/>
               </a:rPr>
@@ -7594,12 +7545,12 @@
               <a:buClr>
                 <a:srgbClr val="FF0000"/>
               </a:buClr>
-              <a:buSzPts val="1400"/>
+              <a:buSzPts val="1200"/>
               <a:buFont typeface="Calibri"/>
               <a:buChar char="●"/>
             </a:pPr>
             <a:r>
-              <a:rPr sz="1400" b="0">
+              <a:rPr sz="1200" b="0">
                 <a:solidFill>
                   <a:srgbClr val="000000"/>
                 </a:solidFill>
@@ -7613,12 +7564,12 @@
               <a:buClr>
                 <a:srgbClr val="FF0000"/>
               </a:buClr>
-              <a:buSzPts val="1400"/>
+              <a:buSzPts val="1200"/>
               <a:buFont typeface="Calibri"/>
               <a:buChar char="●"/>
             </a:pPr>
             <a:r>
-              <a:rPr sz="1400" b="0">
+              <a:rPr sz="1200" b="0">
                 <a:solidFill>
                   <a:srgbClr val="000000"/>
                 </a:solidFill>
@@ -7627,7 +7578,7 @@
               <a:t>It ships with a compensation framework, which is the point: </a:t>
             </a:r>
             <a:r>
-              <a:rPr sz="1400" b="1">
+              <a:rPr sz="1200" b="1">
                 <a:solidFill>
                   <a:srgbClr val="000000"/>
                 </a:solidFill>
@@ -7641,12 +7592,12 @@
               <a:buClr>
                 <a:srgbClr val="FF0000"/>
               </a:buClr>
-              <a:buSzPts val="1400"/>
+              <a:buSzPts val="1200"/>
               <a:buFont typeface="Calibri"/>
               <a:buChar char="●"/>
             </a:pPr>
             <a:r>
-              <a:rPr sz="1400" b="0">
+              <a:rPr sz="1200" b="0">
                 <a:solidFill>
                   <a:srgbClr val="000000"/>
                 </a:solidFill>
@@ -7660,12 +7611,12 @@
               <a:buClr>
                 <a:srgbClr val="FF0000"/>
               </a:buClr>
-              <a:buSzPts val="1400"/>
+              <a:buSzPts val="1200"/>
               <a:buFont typeface="Calibri"/>
               <a:buChar char="●"/>
             </a:pPr>
             <a:r>
-              <a:rPr sz="1400" b="0">
+              <a:rPr sz="1200" b="0">
                 <a:solidFill>
                   <a:srgbClr val="000000"/>
                 </a:solidFill>
@@ -7692,7 +7643,7 @@
         </p:blipFill>
         <p:spPr>
           <a:xfrm>
-            <a:off x="5769864" y="2852547"/>
+            <a:off x="5769864" y="2698242"/>
             <a:ext cx="3291840" cy="1932432"/>
           </a:xfrm>
           <a:prstGeom prst="rect">
@@ -7732,7 +7683,7 @@
         <p:spPr>
           <a:xfrm>
             <a:off x="82296" y="0"/>
-            <a:ext cx="8979408" cy="329184"/>
+            <a:ext cx="1085774" cy="329184"/>
           </a:xfrm>
           <a:prstGeom prst="rect">
             <a:avLst/>
@@ -7740,7 +7691,7 @@
           <a:noFill/>
         </p:spPr>
         <p:txBody>
-          <a:bodyPr wrap="square" lIns="45720" rIns="45720" tIns="18288" bIns="18288">
+          <a:bodyPr wrap="none" lIns="45720" rIns="45720" tIns="18288" bIns="18288">
             <a:spAutoFit/>
           </a:bodyPr>
           <a:lstStyle/>
@@ -7765,8 +7716,8 @@
         </p:nvSpPr>
         <p:spPr>
           <a:xfrm>
-            <a:off x="82296" y="420624"/>
-            <a:ext cx="5577840" cy="3754120"/>
+            <a:off x="82296" y="786384"/>
+            <a:ext cx="5577840" cy="2659887"/>
           </a:xfrm>
           <a:prstGeom prst="rect">
             <a:avLst/>
@@ -7787,9 +7738,9 @@
           <a:lstStyle/>
           <a:p>
             <a:r>
-              <a:rPr sz="1500" b="1">
-                <a:solidFill>
-                  <a:srgbClr val="000000"/>
+              <a:rPr sz="1300" b="1">
+                <a:solidFill>
+                  <a:srgbClr val="FF0000"/>
                 </a:solidFill>
                 <a:latin typeface="Calibri"/>
               </a:rPr>
@@ -7801,12 +7752,12 @@
               <a:buClr>
                 <a:srgbClr val="FF0000"/>
               </a:buClr>
-              <a:buSzPts val="1400"/>
+              <a:buSzPts val="1200"/>
               <a:buFont typeface="Calibri"/>
               <a:buChar char="●"/>
             </a:pPr>
             <a:r>
-              <a:rPr sz="1400" b="0">
+              <a:rPr sz="1200" b="0">
                 <a:solidFill>
                   <a:srgbClr val="000000"/>
                 </a:solidFill>
@@ -7820,12 +7771,12 @@
               <a:buClr>
                 <a:srgbClr val="FF0000"/>
               </a:buClr>
-              <a:buSzPts val="1400"/>
+              <a:buSzPts val="1200"/>
               <a:buFont typeface="Calibri"/>
               <a:buChar char="●"/>
             </a:pPr>
             <a:r>
-              <a:rPr sz="1400" b="1">
+              <a:rPr sz="1200" b="1">
                 <a:solidFill>
                   <a:srgbClr val="000000"/>
                 </a:solidFill>
@@ -7834,7 +7785,7 @@
               <a:t>Modest</a:t>
             </a:r>
             <a:r>
-              <a:rPr sz="1400" b="0">
+              <a:rPr sz="1200" b="0">
                 <a:solidFill>
                   <a:srgbClr val="000000"/>
                 </a:solidFill>
@@ -7848,12 +7799,12 @@
               <a:buClr>
                 <a:srgbClr val="FF0000"/>
               </a:buClr>
-              <a:buSzPts val="1400"/>
+              <a:buSzPts val="1200"/>
               <a:buFont typeface="Calibri"/>
               <a:buChar char="●"/>
             </a:pPr>
             <a:r>
-              <a:rPr sz="1400" b="1">
+              <a:rPr sz="1200" b="1">
                 <a:solidFill>
                   <a:srgbClr val="000000"/>
                 </a:solidFill>
@@ -7862,7 +7813,7 @@
               <a:t>Substantial</a:t>
             </a:r>
             <a:r>
-              <a:rPr sz="1400" b="0">
+              <a:rPr sz="1200" b="0">
                 <a:solidFill>
                   <a:srgbClr val="000000"/>
                 </a:solidFill>
@@ -7876,12 +7827,12 @@
               <a:buClr>
                 <a:srgbClr val="FF0000"/>
               </a:buClr>
-              <a:buSzPts val="1400"/>
+              <a:buSzPts val="1200"/>
               <a:buFont typeface="Calibri"/>
               <a:buChar char="●"/>
             </a:pPr>
             <a:r>
-              <a:rPr sz="1400" b="1">
+              <a:rPr sz="1200" b="1">
                 <a:solidFill>
                   <a:srgbClr val="000000"/>
                 </a:solidFill>
@@ -7890,7 +7841,7 @@
               <a:t>Extreme</a:t>
             </a:r>
             <a:r>
-              <a:rPr sz="1400" b="0">
+              <a:rPr sz="1200" b="0">
                 <a:solidFill>
                   <a:srgbClr val="000000"/>
                 </a:solidFill>
@@ -7904,12 +7855,12 @@
               <a:buClr>
                 <a:srgbClr val="FF0000"/>
               </a:buClr>
-              <a:buSzPts val="1400"/>
+              <a:buSzPts val="1200"/>
               <a:buFont typeface="Calibri"/>
               <a:buChar char="●"/>
             </a:pPr>
             <a:r>
-              <a:rPr sz="1400" b="0">
+              <a:rPr sz="1200" b="0">
                 <a:solidFill>
                   <a:srgbClr val="000000"/>
                 </a:solidFill>
@@ -7923,12 +7874,12 @@
               <a:buClr>
                 <a:srgbClr val="FF0000"/>
               </a:buClr>
-              <a:buSzPts val="1400"/>
+              <a:buSzPts val="1200"/>
               <a:buFont typeface="Calibri"/>
               <a:buChar char="●"/>
             </a:pPr>
             <a:r>
-              <a:rPr sz="1400" b="0">
+              <a:rPr sz="1200" b="0">
                 <a:solidFill>
                   <a:srgbClr val="000000"/>
                 </a:solidFill>
@@ -7939,7 +7890,7 @@
           </a:p>
           <a:p>
             <a:r>
-              <a:rPr sz="1000" b="0">
+              <a:rPr sz="900" b="0">
                 <a:solidFill>
                   <a:srgbClr val="0563C1"/>
                 </a:solidFill>
@@ -8007,7 +7958,7 @@
         <p:spPr>
           <a:xfrm>
             <a:off x="82296" y="0"/>
-            <a:ext cx="8979408" cy="329184"/>
+            <a:ext cx="2193430" cy="329184"/>
           </a:xfrm>
           <a:prstGeom prst="rect">
             <a:avLst/>
@@ -8015,7 +7966,7 @@
           <a:noFill/>
         </p:spPr>
         <p:txBody>
-          <a:bodyPr wrap="square" lIns="45720" rIns="45720" tIns="18288" bIns="18288">
+          <a:bodyPr wrap="none" lIns="45720" rIns="45720" tIns="18288" bIns="18288">
             <a:spAutoFit/>
           </a:bodyPr>
           <a:lstStyle/>
@@ -8040,8 +7991,8 @@
         </p:nvSpPr>
         <p:spPr>
           <a:xfrm>
-            <a:off x="82296" y="420624"/>
-            <a:ext cx="5577840" cy="1273556"/>
+            <a:off x="82296" y="786384"/>
+            <a:ext cx="5577840" cy="770128"/>
           </a:xfrm>
           <a:prstGeom prst="rect">
             <a:avLst/>
@@ -8062,9 +8013,9 @@
           <a:lstStyle/>
           <a:p>
             <a:r>
-              <a:rPr sz="1700" b="1">
-                <a:solidFill>
-                  <a:srgbClr val="000000"/>
+              <a:rPr sz="1300" b="1">
+                <a:solidFill>
+                  <a:srgbClr val="FF0000"/>
                 </a:solidFill>
                 <a:latin typeface="Calibri"/>
               </a:rPr>
@@ -8076,12 +8027,12 @@
               <a:buClr>
                 <a:srgbClr val="FF0000"/>
               </a:buClr>
-              <a:buSzPts val="1600"/>
+              <a:buSzPts val="1200"/>
               <a:buFont typeface="Calibri"/>
               <a:buChar char="●"/>
             </a:pPr>
             <a:r>
-              <a:rPr sz="1600" b="0">
+              <a:rPr sz="1200" b="0">
                 <a:solidFill>
                   <a:srgbClr val="000000"/>
                 </a:solidFill>
@@ -8095,12 +8046,12 @@
               <a:buClr>
                 <a:srgbClr val="FF0000"/>
               </a:buClr>
-              <a:buSzPts val="1600"/>
+              <a:buSzPts val="1200"/>
               <a:buFont typeface="Calibri"/>
               <a:buChar char="●"/>
             </a:pPr>
             <a:r>
-              <a:rPr sz="1600" b="0">
+              <a:rPr sz="1200" b="0">
                 <a:solidFill>
                   <a:srgbClr val="000000"/>
                 </a:solidFill>
@@ -8111,7 +8062,7 @@
           </a:p>
           <a:p>
             <a:r>
-              <a:rPr sz="1200" b="0">
+              <a:rPr sz="900" b="0">
                 <a:solidFill>
                   <a:srgbClr val="0563C1"/>
                 </a:solidFill>
@@ -8139,8 +8090,8 @@
         </p:blipFill>
         <p:spPr>
           <a:xfrm>
-            <a:off x="6161065" y="420624"/>
-            <a:ext cx="2509436" cy="2263140"/>
+            <a:off x="6487207" y="786384"/>
+            <a:ext cx="1857152" cy="1674876"/>
           </a:xfrm>
           <a:prstGeom prst="rect">
             <a:avLst/>
@@ -8160,8 +8111,8 @@
         </p:nvSpPr>
         <p:spPr>
           <a:xfrm>
-            <a:off x="82296" y="2793492"/>
-            <a:ext cx="5577840" cy="1273556"/>
+            <a:off x="82296" y="2827020"/>
+            <a:ext cx="5577840" cy="959104"/>
           </a:xfrm>
           <a:prstGeom prst="rect">
             <a:avLst/>
@@ -8182,9 +8133,9 @@
           <a:lstStyle/>
           <a:p>
             <a:r>
-              <a:rPr sz="1700" b="1">
-                <a:solidFill>
-                  <a:srgbClr val="000000"/>
+              <a:rPr sz="1300" b="1">
+                <a:solidFill>
+                  <a:srgbClr val="FF0000"/>
                 </a:solidFill>
                 <a:latin typeface="Calibri"/>
               </a:rPr>
@@ -8196,12 +8147,12 @@
               <a:buClr>
                 <a:srgbClr val="FF0000"/>
               </a:buClr>
-              <a:buSzPts val="1600"/>
+              <a:buSzPts val="1200"/>
               <a:buFont typeface="Calibri"/>
               <a:buChar char="●"/>
             </a:pPr>
             <a:r>
-              <a:rPr sz="1600" b="0">
+              <a:rPr sz="1200" b="0">
                 <a:solidFill>
                   <a:srgbClr val="000000"/>
                 </a:solidFill>
@@ -8215,12 +8166,12 @@
               <a:buClr>
                 <a:srgbClr val="FF0000"/>
               </a:buClr>
-              <a:buSzPts val="1600"/>
+              <a:buSzPts val="1200"/>
               <a:buFont typeface="Calibri"/>
               <a:buChar char="●"/>
             </a:pPr>
             <a:r>
-              <a:rPr sz="1600" b="0">
+              <a:rPr sz="1200" b="0">
                 <a:solidFill>
                   <a:srgbClr val="000000"/>
                 </a:solidFill>
@@ -8234,12 +8185,12 @@
               <a:buClr>
                 <a:srgbClr val="FF0000"/>
               </a:buClr>
-              <a:buSzPts val="1600"/>
+              <a:buSzPts val="1200"/>
               <a:buFont typeface="Calibri"/>
               <a:buChar char="●"/>
             </a:pPr>
             <a:r>
-              <a:rPr sz="1600" b="0">
+              <a:rPr sz="1200" b="0">
                 <a:solidFill>
                   <a:srgbClr val="000000"/>
                 </a:solidFill>
@@ -8250,7 +8201,7 @@
           </a:p>
           <a:p>
             <a:r>
-              <a:rPr sz="1200" b="0">
+              <a:rPr sz="900" b="0">
                 <a:solidFill>
                   <a:srgbClr val="0563C1"/>
                 </a:solidFill>
@@ -8278,8 +8229,8 @@
         </p:blipFill>
         <p:spPr>
           <a:xfrm>
-            <a:off x="6215297" y="2793492"/>
-            <a:ext cx="2400973" cy="2263140"/>
+            <a:off x="6427100" y="2827020"/>
+            <a:ext cx="1977367" cy="1863851"/>
           </a:xfrm>
           <a:prstGeom prst="rect">
             <a:avLst/>
